--- a/docs/curso/slides/m12-projeto-final.pptx
+++ b/docs/curso/slides/m12-projeto-final.pptx
@@ -2172,6 +2172,54 @@
           <a:chExt cx="0" cy="0"/>
         </a:xfrm>
       </p:grpSpPr>
+      <p:sp>
+        <p:nvSpPr>
+          <p:cNvPr id="25" name="Slide Number Placeholder 0"/>
+          <p:cNvSpPr>
+            <a:spLocks noGrp="1"/>
+          </p:cNvSpPr>
+          <p:nvPr>
+            <p:ph type="sldNum" sz="quarter" idx="4294967295"/>
+          </p:nvPr>
+        </p:nvSpPr>
+        <p:spPr>
+          <a:xfrm>
+            <a:off x="11292840" y="6556248"/>
+            <a:ext cx="548640" cy="256032"/>
+          </a:xfrm>
+          <a:prstGeom prst="rect">
+            <a:avLst/>
+          </a:prstGeom>
+          <a:extLst>
+            <a:ext uri="{C572A759-6A51-4108-AA02-DFA0A04FC94B}">
+              <ma14:wrappingTextBoxFlag xmlns:ma14="http://schemas.microsoft.com/office/mac/drawingml/2011/main" val="0"/>
+            </a:ext>
+          </a:extLst>
+        </p:spPr>
+        <p:txBody>
+          <a:bodyPr/>
+          <a:lstStyle>
+            <a:lvl1pPr>
+              <a:defRPr sz="900">
+                <a:solidFill>
+                  <a:srgbClr val="1B3A6B"/>
+                </a:solidFill>
+                <a:latin typeface="Arial"/>
+                <a:ea typeface="Arial"/>
+                <a:cs typeface="Arial"/>
+              </a:defRPr>
+            </a:lvl1pPr>
+          </a:lstStyle>
+          <a:p>
+            <a:pPr algn="r"/>
+            <a:fld id="{F7021451-1387-4CA6-816F-3879F97B5CBC}" type="slidenum">
+              <a:rPr b="1" lang="en-US"/>
+              <a:t>1000</a:t>
+            </a:fld>
+            <a:endParaRPr lang="en-US"/>
+          </a:p>
+        </p:txBody>
+      </p:sp>
     </p:spTree>
   </p:cSld>
   <p:clrMapOvr>
@@ -2197,6 +2245,54 @@
           <a:chExt cx="0" cy="0"/>
         </a:xfrm>
       </p:grpSpPr>
+      <p:sp>
+        <p:nvSpPr>
+          <p:cNvPr id="25" name="Slide Number Placeholder 0"/>
+          <p:cNvSpPr>
+            <a:spLocks noGrp="1"/>
+          </p:cNvSpPr>
+          <p:nvPr>
+            <p:ph type="sldNum" sz="quarter" idx="4294967295"/>
+          </p:nvPr>
+        </p:nvSpPr>
+        <p:spPr>
+          <a:xfrm>
+            <a:off x="11292840" y="6556248"/>
+            <a:ext cx="548640" cy="256032"/>
+          </a:xfrm>
+          <a:prstGeom prst="rect">
+            <a:avLst/>
+          </a:prstGeom>
+          <a:extLst>
+            <a:ext uri="{C572A759-6A51-4108-AA02-DFA0A04FC94B}">
+              <ma14:wrappingTextBoxFlag xmlns:ma14="http://schemas.microsoft.com/office/mac/drawingml/2011/main" val="0"/>
+            </a:ext>
+          </a:extLst>
+        </p:spPr>
+        <p:txBody>
+          <a:bodyPr/>
+          <a:lstStyle>
+            <a:lvl1pPr>
+              <a:defRPr sz="900">
+                <a:solidFill>
+                  <a:srgbClr val="1B3A6B"/>
+                </a:solidFill>
+                <a:latin typeface="Arial"/>
+                <a:ea typeface="Arial"/>
+                <a:cs typeface="Arial"/>
+              </a:defRPr>
+            </a:lvl1pPr>
+          </a:lstStyle>
+          <a:p>
+            <a:pPr algn="r"/>
+            <a:fld id="{F7021451-1387-4CA6-816F-3879F97B5CBC}" type="slidenum">
+              <a:rPr b="1" lang="en-US"/>
+              <a:t>null</a:t>
+            </a:fld>
+            <a:endParaRPr lang="en-US"/>
+          </a:p>
+        </p:txBody>
+      </p:sp>
     </p:spTree>
   </p:cSld>
   <p:clrMap bg1="lt1" tx1="dk1" bg2="lt2" tx2="dk2" accent1="accent1" accent2="accent2" accent3="accent3" accent4="accent4" accent5="accent5" accent6="accent6" hlink="hlink" folHlink="folHlink"/>
@@ -2900,7 +2996,7 @@
         </p:blipFill>
         <p:spPr>
           <a:xfrm>
-            <a:off x="411480" y="6547104"/>
+            <a:off x="548640" y="6547104"/>
             <a:ext cx="274320" cy="274320"/>
           </a:xfrm>
           <a:prstGeom prst="rect">
@@ -2916,7 +3012,7 @@
         </p:nvSpPr>
         <p:spPr>
           <a:xfrm>
-            <a:off x="749808" y="6528816"/>
+            <a:off x="886968" y="6528816"/>
             <a:ext cx="6400800" cy="310896"/>
           </a:xfrm>
           <a:prstGeom prst="rect">
@@ -2956,7 +3052,7 @@
         <p:spPr>
           <a:xfrm>
             <a:off x="7132320" y="6528816"/>
-            <a:ext cx="4663440" cy="310896"/>
+            <a:ext cx="4023360" cy="310896"/>
           </a:xfrm>
           <a:prstGeom prst="rect">
             <a:avLst/>
@@ -2994,7 +3090,7 @@
         </p:nvSpPr>
         <p:spPr>
           <a:xfrm>
-            <a:off x="411480" y="384048"/>
+            <a:off x="548640" y="384048"/>
             <a:ext cx="82296" cy="658368"/>
           </a:xfrm>
           <a:prstGeom prst="rect">
@@ -3014,7 +3110,7 @@
         </p:nvSpPr>
         <p:spPr>
           <a:xfrm>
-            <a:off x="640080" y="292608"/>
+            <a:off x="777240" y="292608"/>
             <a:ext cx="10972800" cy="274320"/>
           </a:xfrm>
           <a:prstGeom prst="rect">
@@ -3053,8 +3149,8 @@
         </p:nvSpPr>
         <p:spPr>
           <a:xfrm>
-            <a:off x="640080" y="530352"/>
-            <a:ext cx="11155680" cy="566928"/>
+            <a:off x="777240" y="530352"/>
+            <a:ext cx="10881360" cy="566928"/>
           </a:xfrm>
           <a:prstGeom prst="rect">
             <a:avLst/>
@@ -3094,8 +3190,8 @@
         </p:nvSpPr>
         <p:spPr>
           <a:xfrm>
-            <a:off x="411480" y="1325880"/>
-            <a:ext cx="3642360" cy="2331720"/>
+            <a:off x="548640" y="1325880"/>
+            <a:ext cx="3544824" cy="2331720"/>
           </a:xfrm>
           <a:prstGeom prst="roundRect">
             <a:avLst>
@@ -3128,7 +3224,7 @@
         </p:nvSpPr>
         <p:spPr>
           <a:xfrm>
-            <a:off x="594360" y="1508760"/>
+            <a:off x="731520" y="1508760"/>
             <a:ext cx="457200" cy="457200"/>
           </a:xfrm>
           <a:prstGeom prst="ellipse">
@@ -3148,7 +3244,7 @@
         </p:nvSpPr>
         <p:spPr>
           <a:xfrm>
-            <a:off x="594360" y="1508760"/>
+            <a:off x="731520" y="1508760"/>
             <a:ext cx="457200" cy="457200"/>
           </a:xfrm>
           <a:prstGeom prst="rect">
@@ -3187,8 +3283,8 @@
         </p:nvSpPr>
         <p:spPr>
           <a:xfrm>
-            <a:off x="1188720" y="1435608"/>
-            <a:ext cx="2727960" cy="2112264"/>
+            <a:off x="1325880" y="1435608"/>
+            <a:ext cx="2630424" cy="2112264"/>
           </a:xfrm>
           <a:prstGeom prst="rect">
             <a:avLst/>
@@ -3228,8 +3324,8 @@
         </p:nvSpPr>
         <p:spPr>
           <a:xfrm>
-            <a:off x="4282440" y="1325880"/>
-            <a:ext cx="3642360" cy="2331720"/>
+            <a:off x="4322064" y="1325880"/>
+            <a:ext cx="3544824" cy="2331720"/>
           </a:xfrm>
           <a:prstGeom prst="roundRect">
             <a:avLst>
@@ -3262,7 +3358,7 @@
         </p:nvSpPr>
         <p:spPr>
           <a:xfrm>
-            <a:off x="4465320" y="1508760"/>
+            <a:off x="4504944" y="1508760"/>
             <a:ext cx="457200" cy="457200"/>
           </a:xfrm>
           <a:prstGeom prst="ellipse">
@@ -3282,7 +3378,7 @@
         </p:nvSpPr>
         <p:spPr>
           <a:xfrm>
-            <a:off x="4465320" y="1508760"/>
+            <a:off x="4504944" y="1508760"/>
             <a:ext cx="457200" cy="457200"/>
           </a:xfrm>
           <a:prstGeom prst="rect">
@@ -3321,8 +3417,8 @@
         </p:nvSpPr>
         <p:spPr>
           <a:xfrm>
-            <a:off x="5059680" y="1435608"/>
-            <a:ext cx="2727960" cy="2112264"/>
+            <a:off x="5099304" y="1435608"/>
+            <a:ext cx="2630424" cy="2112264"/>
           </a:xfrm>
           <a:prstGeom prst="rect">
             <a:avLst/>
@@ -3362,8 +3458,8 @@
         </p:nvSpPr>
         <p:spPr>
           <a:xfrm>
-            <a:off x="8153400" y="1325880"/>
-            <a:ext cx="3642360" cy="2331720"/>
+            <a:off x="8095488" y="1325880"/>
+            <a:ext cx="3544824" cy="2331720"/>
           </a:xfrm>
           <a:prstGeom prst="roundRect">
             <a:avLst>
@@ -3396,7 +3492,7 @@
         </p:nvSpPr>
         <p:spPr>
           <a:xfrm>
-            <a:off x="8336280" y="1508760"/>
+            <a:off x="8278368" y="1508760"/>
             <a:ext cx="457200" cy="457200"/>
           </a:xfrm>
           <a:prstGeom prst="ellipse">
@@ -3416,7 +3512,7 @@
         </p:nvSpPr>
         <p:spPr>
           <a:xfrm>
-            <a:off x="8336280" y="1508760"/>
+            <a:off x="8278368" y="1508760"/>
             <a:ext cx="457200" cy="457200"/>
           </a:xfrm>
           <a:prstGeom prst="rect">
@@ -3455,8 +3551,8 @@
         </p:nvSpPr>
         <p:spPr>
           <a:xfrm>
-            <a:off x="8930640" y="1435608"/>
-            <a:ext cx="2727960" cy="2112264"/>
+            <a:off x="8872728" y="1435608"/>
+            <a:ext cx="2630424" cy="2112264"/>
           </a:xfrm>
           <a:prstGeom prst="rect">
             <a:avLst/>
@@ -3496,8 +3592,8 @@
         </p:nvSpPr>
         <p:spPr>
           <a:xfrm>
-            <a:off x="411480" y="3886200"/>
-            <a:ext cx="3642360" cy="2331720"/>
+            <a:off x="548640" y="3886200"/>
+            <a:ext cx="3544824" cy="2331720"/>
           </a:xfrm>
           <a:prstGeom prst="roundRect">
             <a:avLst>
@@ -3530,7 +3626,7 @@
         </p:nvSpPr>
         <p:spPr>
           <a:xfrm>
-            <a:off x="594360" y="4069080"/>
+            <a:off x="731520" y="4069080"/>
             <a:ext cx="457200" cy="457200"/>
           </a:xfrm>
           <a:prstGeom prst="ellipse">
@@ -3550,7 +3646,7 @@
         </p:nvSpPr>
         <p:spPr>
           <a:xfrm>
-            <a:off x="594360" y="4069080"/>
+            <a:off x="731520" y="4069080"/>
             <a:ext cx="457200" cy="457200"/>
           </a:xfrm>
           <a:prstGeom prst="rect">
@@ -3589,8 +3685,8 @@
         </p:nvSpPr>
         <p:spPr>
           <a:xfrm>
-            <a:off x="1188720" y="3995928"/>
-            <a:ext cx="2727960" cy="2112264"/>
+            <a:off x="1325880" y="3995928"/>
+            <a:ext cx="2630424" cy="2112264"/>
           </a:xfrm>
           <a:prstGeom prst="rect">
             <a:avLst/>
@@ -3630,8 +3726,8 @@
         </p:nvSpPr>
         <p:spPr>
           <a:xfrm>
-            <a:off x="4282440" y="3886200"/>
-            <a:ext cx="3642360" cy="2331720"/>
+            <a:off x="4322064" y="3886200"/>
+            <a:ext cx="3544824" cy="2331720"/>
           </a:xfrm>
           <a:prstGeom prst="roundRect">
             <a:avLst>
@@ -3664,7 +3760,7 @@
         </p:nvSpPr>
         <p:spPr>
           <a:xfrm>
-            <a:off x="4465320" y="4069080"/>
+            <a:off x="4504944" y="4069080"/>
             <a:ext cx="457200" cy="457200"/>
           </a:xfrm>
           <a:prstGeom prst="ellipse">
@@ -3684,7 +3780,7 @@
         </p:nvSpPr>
         <p:spPr>
           <a:xfrm>
-            <a:off x="4465320" y="4069080"/>
+            <a:off x="4504944" y="4069080"/>
             <a:ext cx="457200" cy="457200"/>
           </a:xfrm>
           <a:prstGeom prst="rect">
@@ -3723,8 +3819,8 @@
         </p:nvSpPr>
         <p:spPr>
           <a:xfrm>
-            <a:off x="5059680" y="3995928"/>
-            <a:ext cx="2727960" cy="2112264"/>
+            <a:off x="5099304" y="3995928"/>
+            <a:ext cx="2630424" cy="2112264"/>
           </a:xfrm>
           <a:prstGeom prst="rect">
             <a:avLst/>
@@ -3753,6 +3849,54 @@
               <a:t>tudo aplicável à vida real</a:t>
             </a:r>
             <a:endParaRPr lang="en-US" sz="1800" dirty="0"/>
+          </a:p>
+        </p:txBody>
+      </p:sp>
+      <p:sp>
+        <p:nvSpPr>
+          <p:cNvPr id="25" name="Slide Number Placeholder 0"/>
+          <p:cNvSpPr>
+            <a:spLocks noGrp="1"/>
+          </p:cNvSpPr>
+          <p:nvPr>
+            <p:ph type="sldNum" sz="quarter" idx="4294967295"/>
+          </p:nvPr>
+        </p:nvSpPr>
+        <p:spPr>
+          <a:xfrm>
+            <a:off x="11292840" y="6556248"/>
+            <a:ext cx="548640" cy="256032"/>
+          </a:xfrm>
+          <a:prstGeom prst="rect">
+            <a:avLst/>
+          </a:prstGeom>
+          <a:extLst>
+            <a:ext uri="{C572A759-6A51-4108-AA02-DFA0A04FC94B}">
+              <ma14:wrappingTextBoxFlag xmlns:ma14="http://schemas.microsoft.com/office/mac/drawingml/2011/main" val="0"/>
+            </a:ext>
+          </a:extLst>
+        </p:spPr>
+        <p:txBody>
+          <a:bodyPr/>
+          <a:lstStyle>
+            <a:lvl1pPr>
+              <a:defRPr sz="900">
+                <a:solidFill>
+                  <a:srgbClr val="1B3A6B"/>
+                </a:solidFill>
+                <a:latin typeface="Arial"/>
+                <a:ea typeface="Arial"/>
+                <a:cs typeface="Arial"/>
+              </a:defRPr>
+            </a:lvl1pPr>
+          </a:lstStyle>
+          <a:p>
+            <a:pPr algn="r"/>
+            <a:fld id="{F7021451-1387-4CA6-816F-3879F97B5CBC}" type="slidenum">
+              <a:rPr b="1" lang="en-US"/>
+              <a:t>10</a:t>
+            </a:fld>
+            <a:endParaRPr lang="en-US"/>
           </a:p>
         </p:txBody>
       </p:sp>
@@ -3829,7 +3973,7 @@
         </p:blipFill>
         <p:spPr>
           <a:xfrm>
-            <a:off x="411480" y="6547104"/>
+            <a:off x="548640" y="6547104"/>
             <a:ext cx="274320" cy="274320"/>
           </a:xfrm>
           <a:prstGeom prst="rect">
@@ -3845,7 +3989,7 @@
         </p:nvSpPr>
         <p:spPr>
           <a:xfrm>
-            <a:off x="749808" y="6528816"/>
+            <a:off x="886968" y="6528816"/>
             <a:ext cx="6400800" cy="310896"/>
           </a:xfrm>
           <a:prstGeom prst="rect">
@@ -3885,7 +4029,7 @@
         <p:spPr>
           <a:xfrm>
             <a:off x="7132320" y="6528816"/>
-            <a:ext cx="4663440" cy="310896"/>
+            <a:ext cx="4023360" cy="310896"/>
           </a:xfrm>
           <a:prstGeom prst="rect">
             <a:avLst/>
@@ -3923,7 +4067,7 @@
         </p:nvSpPr>
         <p:spPr>
           <a:xfrm>
-            <a:off x="411480" y="384048"/>
+            <a:off x="548640" y="384048"/>
             <a:ext cx="82296" cy="658368"/>
           </a:xfrm>
           <a:prstGeom prst="rect">
@@ -3943,7 +4087,7 @@
         </p:nvSpPr>
         <p:spPr>
           <a:xfrm>
-            <a:off x="640080" y="292608"/>
+            <a:off x="777240" y="292608"/>
             <a:ext cx="10972800" cy="274320"/>
           </a:xfrm>
           <a:prstGeom prst="rect">
@@ -3982,8 +4126,8 @@
         </p:nvSpPr>
         <p:spPr>
           <a:xfrm>
-            <a:off x="640080" y="530352"/>
-            <a:ext cx="11155680" cy="566928"/>
+            <a:off x="777240" y="530352"/>
+            <a:ext cx="10881360" cy="566928"/>
           </a:xfrm>
           <a:prstGeom prst="rect">
             <a:avLst/>
@@ -4235,6 +4379,54 @@
               <a:t>Plano · conta com cenários · relatório do trimestre · produtor · economia · SOP · régua · riscos</a:t>
             </a:r>
             <a:endParaRPr lang="en-US" sz="1500" dirty="0"/>
+          </a:p>
+        </p:txBody>
+      </p:sp>
+      <p:sp>
+        <p:nvSpPr>
+          <p:cNvPr id="25" name="Slide Number Placeholder 0"/>
+          <p:cNvSpPr>
+            <a:spLocks noGrp="1"/>
+          </p:cNvSpPr>
+          <p:nvPr>
+            <p:ph type="sldNum" sz="quarter" idx="4294967295"/>
+          </p:nvPr>
+        </p:nvSpPr>
+        <p:spPr>
+          <a:xfrm>
+            <a:off x="11292840" y="6556248"/>
+            <a:ext cx="548640" cy="256032"/>
+          </a:xfrm>
+          <a:prstGeom prst="rect">
+            <a:avLst/>
+          </a:prstGeom>
+          <a:extLst>
+            <a:ext uri="{C572A759-6A51-4108-AA02-DFA0A04FC94B}">
+              <ma14:wrappingTextBoxFlag xmlns:ma14="http://schemas.microsoft.com/office/mac/drawingml/2011/main" val="0"/>
+            </a:ext>
+          </a:extLst>
+        </p:spPr>
+        <p:txBody>
+          <a:bodyPr/>
+          <a:lstStyle>
+            <a:lvl1pPr>
+              <a:defRPr sz="900">
+                <a:solidFill>
+                  <a:srgbClr val="1B3A6B"/>
+                </a:solidFill>
+                <a:latin typeface="Arial"/>
+                <a:ea typeface="Arial"/>
+                <a:cs typeface="Arial"/>
+              </a:defRPr>
+            </a:lvl1pPr>
+          </a:lstStyle>
+          <a:p>
+            <a:pPr algn="r"/>
+            <a:fld id="{F7021451-1387-4CA6-816F-3879F97B5CBC}" type="slidenum">
+              <a:rPr b="1" lang="en-US"/>
+              <a:t>11</a:t>
+            </a:fld>
+            <a:endParaRPr lang="en-US"/>
           </a:p>
         </p:txBody>
       </p:sp>
@@ -4311,7 +4503,7 @@
         </p:blipFill>
         <p:spPr>
           <a:xfrm>
-            <a:off x="411480" y="6547104"/>
+            <a:off x="548640" y="6547104"/>
             <a:ext cx="274320" cy="274320"/>
           </a:xfrm>
           <a:prstGeom prst="rect">
@@ -4327,7 +4519,7 @@
         </p:nvSpPr>
         <p:spPr>
           <a:xfrm>
-            <a:off x="749808" y="6528816"/>
+            <a:off x="886968" y="6528816"/>
             <a:ext cx="6400800" cy="310896"/>
           </a:xfrm>
           <a:prstGeom prst="rect">
@@ -4367,7 +4559,7 @@
         <p:spPr>
           <a:xfrm>
             <a:off x="7132320" y="6528816"/>
-            <a:ext cx="4663440" cy="310896"/>
+            <a:ext cx="4023360" cy="310896"/>
           </a:xfrm>
           <a:prstGeom prst="rect">
             <a:avLst/>
@@ -4405,7 +4597,7 @@
         </p:nvSpPr>
         <p:spPr>
           <a:xfrm>
-            <a:off x="411480" y="384048"/>
+            <a:off x="548640" y="384048"/>
             <a:ext cx="82296" cy="658368"/>
           </a:xfrm>
           <a:prstGeom prst="rect">
@@ -4425,7 +4617,7 @@
         </p:nvSpPr>
         <p:spPr>
           <a:xfrm>
-            <a:off x="640080" y="292608"/>
+            <a:off x="777240" y="292608"/>
             <a:ext cx="10972800" cy="274320"/>
           </a:xfrm>
           <a:prstGeom prst="rect">
@@ -4464,8 +4656,8 @@
         </p:nvSpPr>
         <p:spPr>
           <a:xfrm>
-            <a:off x="640080" y="530352"/>
-            <a:ext cx="11155680" cy="566928"/>
+            <a:off x="777240" y="530352"/>
+            <a:ext cx="10881360" cy="566928"/>
           </a:xfrm>
           <a:prstGeom prst="rect">
             <a:avLst/>
@@ -4555,6 +4747,54 @@
           </a:prstGeom>
         </p:spPr>
       </p:pic>
+      <p:sp>
+        <p:nvSpPr>
+          <p:cNvPr id="25" name="Slide Number Placeholder 0"/>
+          <p:cNvSpPr>
+            <a:spLocks noGrp="1"/>
+          </p:cNvSpPr>
+          <p:nvPr>
+            <p:ph type="sldNum" sz="quarter" idx="4294967295"/>
+          </p:nvPr>
+        </p:nvSpPr>
+        <p:spPr>
+          <a:xfrm>
+            <a:off x="11292840" y="6556248"/>
+            <a:ext cx="548640" cy="256032"/>
+          </a:xfrm>
+          <a:prstGeom prst="rect">
+            <a:avLst/>
+          </a:prstGeom>
+          <a:extLst>
+            <a:ext uri="{C572A759-6A51-4108-AA02-DFA0A04FC94B}">
+              <ma14:wrappingTextBoxFlag xmlns:ma14="http://schemas.microsoft.com/office/mac/drawingml/2011/main" val="0"/>
+            </a:ext>
+          </a:extLst>
+        </p:spPr>
+        <p:txBody>
+          <a:bodyPr/>
+          <a:lstStyle>
+            <a:lvl1pPr>
+              <a:defRPr sz="900">
+                <a:solidFill>
+                  <a:srgbClr val="1B3A6B"/>
+                </a:solidFill>
+                <a:latin typeface="Arial"/>
+                <a:ea typeface="Arial"/>
+                <a:cs typeface="Arial"/>
+              </a:defRPr>
+            </a:lvl1pPr>
+          </a:lstStyle>
+          <a:p>
+            <a:pPr algn="r"/>
+            <a:fld id="{F7021451-1387-4CA6-816F-3879F97B5CBC}" type="slidenum">
+              <a:rPr b="1" lang="en-US"/>
+              <a:t>12</a:t>
+            </a:fld>
+            <a:endParaRPr lang="en-US"/>
+          </a:p>
+        </p:txBody>
+      </p:sp>
     </p:spTree>
   </p:cSld>
   <p:clrMapOvr>
@@ -4615,6 +4855,45 @@
         </p:nvSpPr>
         <p:spPr>
           <a:xfrm>
+            <a:off x="457200" y="548640"/>
+            <a:ext cx="3474720" cy="1737360"/>
+          </a:xfrm>
+          <a:prstGeom prst="rect">
+            <a:avLst/>
+          </a:prstGeom>
+          <a:noFill/>
+          <a:ln/>
+        </p:spPr>
+        <p:txBody>
+          <a:bodyPr wrap="square" rtlCol="0" anchor="ctr"/>
+          <a:lstStyle/>
+          <a:p>
+            <a:pPr indent="0" marL="0">
+              <a:buNone/>
+            </a:pPr>
+            <a:r>
+              <a:rPr lang="en-US" sz="11000" b="1" dirty="0">
+                <a:solidFill>
+                  <a:srgbClr val="11396F"/>
+                </a:solidFill>
+                <a:latin typeface="Arial" pitchFamily="34" charset="0"/>
+                <a:ea typeface="Arial" pitchFamily="34" charset="-122"/>
+                <a:cs typeface="Arial" pitchFamily="34" charset="-120"/>
+              </a:rPr>
+              <a:t>04</a:t>
+            </a:r>
+            <a:endParaRPr lang="en-US" sz="11000" dirty="0"/>
+          </a:p>
+        </p:txBody>
+      </p:sp>
+      <p:sp>
+        <p:nvSpPr>
+          <p:cNvPr id="4" name="Text 2"/>
+          <p:cNvSpPr/>
+          <p:nvPr/>
+        </p:nvSpPr>
+        <p:spPr>
+          <a:xfrm>
             <a:off x="548640" y="2194560"/>
             <a:ext cx="3291840" cy="548640"/>
           </a:xfrm>
@@ -4648,7 +4927,46 @@
       </p:sp>
       <p:sp>
         <p:nvSpPr>
-          <p:cNvPr id="4" name="Text 2"/>
+          <p:cNvPr id="5" name="Text 3"/>
+          <p:cNvSpPr/>
+          <p:nvPr/>
+        </p:nvSpPr>
+        <p:spPr>
+          <a:xfrm>
+            <a:off x="548640" y="3200400"/>
+            <a:ext cx="3383280" cy="457200"/>
+          </a:xfrm>
+          <a:prstGeom prst="rect">
+            <a:avLst/>
+          </a:prstGeom>
+          <a:noFill/>
+          <a:ln/>
+        </p:spPr>
+        <p:txBody>
+          <a:bodyPr wrap="square" rtlCol="0" anchor="ctr"/>
+          <a:lstStyle/>
+          <a:p>
+            <a:pPr indent="0" marL="0">
+              <a:buNone/>
+            </a:pPr>
+            <a:r>
+              <a:rPr lang="en-US" sz="1100" dirty="0">
+                <a:solidFill>
+                  <a:srgbClr val="C7D2E3"/>
+                </a:solidFill>
+                <a:latin typeface="Arial" pitchFamily="34" charset="0"/>
+                <a:ea typeface="Arial" pitchFamily="34" charset="-122"/>
+                <a:cs typeface="Arial" pitchFamily="34" charset="-120"/>
+              </a:rPr>
+              <a:t>M12 · Etapa 4 · Gestão e estratégia</a:t>
+            </a:r>
+            <a:endParaRPr lang="en-US" sz="1100" dirty="0"/>
+          </a:p>
+        </p:txBody>
+      </p:sp>
+      <p:sp>
+        <p:nvSpPr>
+          <p:cNvPr id="6" name="Text 4"/>
           <p:cNvSpPr/>
           <p:nvPr/>
         </p:nvSpPr>
@@ -4687,7 +5005,7 @@
       </p:sp>
       <p:pic>
         <p:nvPicPr>
-          <p:cNvPr id="5" name="Image 0" descr="/www/wwwroot/rexar/gdsolar/docs/curso/slides/assets/logo-gdsolar.png">    </p:cNvPr>
+          <p:cNvPr id="7" name="Image 0" descr="/www/wwwroot/rexar/gdsolar/docs/curso/slides/assets/logo-gdsolar.png">    </p:cNvPr>
           <p:cNvPicPr>
             <a:picLocks noChangeAspect="1"/>
           </p:cNvPicPr>
@@ -4711,7 +5029,7 @@
       </p:pic>
       <p:sp>
         <p:nvSpPr>
-          <p:cNvPr id="6" name="Text 3"/>
+          <p:cNvPr id="8" name="Text 5"/>
           <p:cNvSpPr/>
           <p:nvPr/>
         </p:nvSpPr>
@@ -4752,7 +5070,7 @@
       </p:sp>
       <p:sp>
         <p:nvSpPr>
-          <p:cNvPr id="7" name="Text 4"/>
+          <p:cNvPr id="9" name="Text 6"/>
           <p:cNvSpPr/>
           <p:nvPr/>
         </p:nvSpPr>
@@ -4793,7 +5111,7 @@
       </p:sp>
       <p:sp>
         <p:nvSpPr>
-          <p:cNvPr id="8" name="Text 5"/>
+          <p:cNvPr id="10" name="Text 7"/>
           <p:cNvSpPr/>
           <p:nvPr/>
         </p:nvSpPr>
@@ -4930,7 +5248,7 @@
         </p:blipFill>
         <p:spPr>
           <a:xfrm>
-            <a:off x="411480" y="6547104"/>
+            <a:off x="548640" y="6547104"/>
             <a:ext cx="274320" cy="274320"/>
           </a:xfrm>
           <a:prstGeom prst="rect">
@@ -4946,7 +5264,7 @@
         </p:nvSpPr>
         <p:spPr>
           <a:xfrm>
-            <a:off x="749808" y="6528816"/>
+            <a:off x="886968" y="6528816"/>
             <a:ext cx="6400800" cy="310896"/>
           </a:xfrm>
           <a:prstGeom prst="rect">
@@ -4986,7 +5304,7 @@
         <p:spPr>
           <a:xfrm>
             <a:off x="7132320" y="6528816"/>
-            <a:ext cx="4663440" cy="310896"/>
+            <a:ext cx="4023360" cy="310896"/>
           </a:xfrm>
           <a:prstGeom prst="rect">
             <a:avLst/>
@@ -5024,7 +5342,7 @@
         </p:nvSpPr>
         <p:spPr>
           <a:xfrm>
-            <a:off x="411480" y="384048"/>
+            <a:off x="548640" y="384048"/>
             <a:ext cx="82296" cy="658368"/>
           </a:xfrm>
           <a:prstGeom prst="rect">
@@ -5044,7 +5362,7 @@
         </p:nvSpPr>
         <p:spPr>
           <a:xfrm>
-            <a:off x="640080" y="292608"/>
+            <a:off x="777240" y="292608"/>
             <a:ext cx="10972800" cy="274320"/>
           </a:xfrm>
           <a:prstGeom prst="rect">
@@ -5083,8 +5401,8 @@
         </p:nvSpPr>
         <p:spPr>
           <a:xfrm>
-            <a:off x="640080" y="530352"/>
-            <a:ext cx="11155680" cy="566928"/>
+            <a:off x="777240" y="530352"/>
+            <a:ext cx="10881360" cy="566928"/>
           </a:xfrm>
           <a:prstGeom prst="rect">
             <a:avLst/>
@@ -5200,6 +5518,54 @@
               <a:t>Dias 61–90: pré-venda com data honesta · primeiros 30 clientes · rateio · primeiro ciclo</a:t>
             </a:r>
             <a:endParaRPr lang="en-US" sz="1400" dirty="0"/>
+          </a:p>
+        </p:txBody>
+      </p:sp>
+      <p:sp>
+        <p:nvSpPr>
+          <p:cNvPr id="25" name="Slide Number Placeholder 0"/>
+          <p:cNvSpPr>
+            <a:spLocks noGrp="1"/>
+          </p:cNvSpPr>
+          <p:nvPr>
+            <p:ph type="sldNum" sz="quarter" idx="4294967295"/>
+          </p:nvPr>
+        </p:nvSpPr>
+        <p:spPr>
+          <a:xfrm>
+            <a:off x="11292840" y="6556248"/>
+            <a:ext cx="548640" cy="256032"/>
+          </a:xfrm>
+          <a:prstGeom prst="rect">
+            <a:avLst/>
+          </a:prstGeom>
+          <a:extLst>
+            <a:ext uri="{C572A759-6A51-4108-AA02-DFA0A04FC94B}">
+              <ma14:wrappingTextBoxFlag xmlns:ma14="http://schemas.microsoft.com/office/mac/drawingml/2011/main" val="0"/>
+            </a:ext>
+          </a:extLst>
+        </p:spPr>
+        <p:txBody>
+          <a:bodyPr/>
+          <a:lstStyle>
+            <a:lvl1pPr>
+              <a:defRPr sz="900">
+                <a:solidFill>
+                  <a:srgbClr val="1B3A6B"/>
+                </a:solidFill>
+                <a:latin typeface="Arial"/>
+                <a:ea typeface="Arial"/>
+                <a:cs typeface="Arial"/>
+              </a:defRPr>
+            </a:lvl1pPr>
+          </a:lstStyle>
+          <a:p>
+            <a:pPr algn="r"/>
+            <a:fld id="{F7021451-1387-4CA6-816F-3879F97B5CBC}" type="slidenum">
+              <a:rPr b="1" lang="en-US"/>
+              <a:t>14</a:t>
+            </a:fld>
+            <a:endParaRPr lang="en-US"/>
           </a:p>
         </p:txBody>
       </p:sp>
@@ -5276,7 +5642,7 @@
         </p:blipFill>
         <p:spPr>
           <a:xfrm>
-            <a:off x="411480" y="6547104"/>
+            <a:off x="548640" y="6547104"/>
             <a:ext cx="274320" cy="274320"/>
           </a:xfrm>
           <a:prstGeom prst="rect">
@@ -5292,7 +5658,7 @@
         </p:nvSpPr>
         <p:spPr>
           <a:xfrm>
-            <a:off x="749808" y="6528816"/>
+            <a:off x="886968" y="6528816"/>
             <a:ext cx="6400800" cy="310896"/>
           </a:xfrm>
           <a:prstGeom prst="rect">
@@ -5332,7 +5698,7 @@
         <p:spPr>
           <a:xfrm>
             <a:off x="7132320" y="6528816"/>
-            <a:ext cx="4663440" cy="310896"/>
+            <a:ext cx="4023360" cy="310896"/>
           </a:xfrm>
           <a:prstGeom prst="rect">
             <a:avLst/>
@@ -5370,7 +5736,7 @@
         </p:nvSpPr>
         <p:spPr>
           <a:xfrm>
-            <a:off x="411480" y="384048"/>
+            <a:off x="548640" y="384048"/>
             <a:ext cx="82296" cy="658368"/>
           </a:xfrm>
           <a:prstGeom prst="rect">
@@ -5390,7 +5756,7 @@
         </p:nvSpPr>
         <p:spPr>
           <a:xfrm>
-            <a:off x="640080" y="292608"/>
+            <a:off x="777240" y="292608"/>
             <a:ext cx="10972800" cy="274320"/>
           </a:xfrm>
           <a:prstGeom prst="rect">
@@ -5429,8 +5795,8 @@
         </p:nvSpPr>
         <p:spPr>
           <a:xfrm>
-            <a:off x="640080" y="530352"/>
-            <a:ext cx="11155680" cy="566928"/>
+            <a:off x="777240" y="530352"/>
+            <a:ext cx="10881360" cy="566928"/>
           </a:xfrm>
           <a:prstGeom prst="rect">
             <a:avLst/>
@@ -5470,8 +5836,8 @@
         </p:nvSpPr>
         <p:spPr>
           <a:xfrm>
-            <a:off x="411480" y="1325880"/>
-            <a:ext cx="5577840" cy="2331720"/>
+            <a:off x="548640" y="1325880"/>
+            <a:ext cx="5431536" cy="2331720"/>
           </a:xfrm>
           <a:prstGeom prst="roundRect">
             <a:avLst>
@@ -5504,7 +5870,7 @@
         </p:nvSpPr>
         <p:spPr>
           <a:xfrm>
-            <a:off x="594360" y="1508760"/>
+            <a:off x="731520" y="1508760"/>
             <a:ext cx="457200" cy="457200"/>
           </a:xfrm>
           <a:prstGeom prst="ellipse">
@@ -5524,7 +5890,7 @@
         </p:nvSpPr>
         <p:spPr>
           <a:xfrm>
-            <a:off x="594360" y="1508760"/>
+            <a:off x="731520" y="1508760"/>
             <a:ext cx="457200" cy="457200"/>
           </a:xfrm>
           <a:prstGeom prst="rect">
@@ -5563,8 +5929,8 @@
         </p:nvSpPr>
         <p:spPr>
           <a:xfrm>
-            <a:off x="1188720" y="1435608"/>
-            <a:ext cx="4663440" cy="2112264"/>
+            <a:off x="1325880" y="1435608"/>
+            <a:ext cx="4517136" cy="2112264"/>
           </a:xfrm>
           <a:prstGeom prst="rect">
             <a:avLst/>
@@ -5604,8 +5970,8 @@
         </p:nvSpPr>
         <p:spPr>
           <a:xfrm>
-            <a:off x="6217920" y="1325880"/>
-            <a:ext cx="5577840" cy="2331720"/>
+            <a:off x="6208776" y="1325880"/>
+            <a:ext cx="5431536" cy="2331720"/>
           </a:xfrm>
           <a:prstGeom prst="roundRect">
             <a:avLst>
@@ -5638,7 +6004,7 @@
         </p:nvSpPr>
         <p:spPr>
           <a:xfrm>
-            <a:off x="6400800" y="1508760"/>
+            <a:off x="6391656" y="1508760"/>
             <a:ext cx="457200" cy="457200"/>
           </a:xfrm>
           <a:prstGeom prst="ellipse">
@@ -5658,7 +6024,7 @@
         </p:nvSpPr>
         <p:spPr>
           <a:xfrm>
-            <a:off x="6400800" y="1508760"/>
+            <a:off x="6391656" y="1508760"/>
             <a:ext cx="457200" cy="457200"/>
           </a:xfrm>
           <a:prstGeom prst="rect">
@@ -5697,8 +6063,8 @@
         </p:nvSpPr>
         <p:spPr>
           <a:xfrm>
-            <a:off x="6995160" y="1435608"/>
-            <a:ext cx="4663440" cy="2112264"/>
+            <a:off x="6986016" y="1435608"/>
+            <a:ext cx="4517136" cy="2112264"/>
           </a:xfrm>
           <a:prstGeom prst="rect">
             <a:avLst/>
@@ -5738,8 +6104,8 @@
         </p:nvSpPr>
         <p:spPr>
           <a:xfrm>
-            <a:off x="411480" y="3886200"/>
-            <a:ext cx="5577840" cy="2331720"/>
+            <a:off x="548640" y="3886200"/>
+            <a:ext cx="5431536" cy="2331720"/>
           </a:xfrm>
           <a:prstGeom prst="roundRect">
             <a:avLst>
@@ -5772,7 +6138,7 @@
         </p:nvSpPr>
         <p:spPr>
           <a:xfrm>
-            <a:off x="594360" y="4069080"/>
+            <a:off x="731520" y="4069080"/>
             <a:ext cx="457200" cy="457200"/>
           </a:xfrm>
           <a:prstGeom prst="ellipse">
@@ -5792,7 +6158,7 @@
         </p:nvSpPr>
         <p:spPr>
           <a:xfrm>
-            <a:off x="594360" y="4069080"/>
+            <a:off x="731520" y="4069080"/>
             <a:ext cx="457200" cy="457200"/>
           </a:xfrm>
           <a:prstGeom prst="rect">
@@ -5831,8 +6197,8 @@
         </p:nvSpPr>
         <p:spPr>
           <a:xfrm>
-            <a:off x="1188720" y="3995928"/>
-            <a:ext cx="4663440" cy="2112264"/>
+            <a:off x="1325880" y="3995928"/>
+            <a:ext cx="4517136" cy="2112264"/>
           </a:xfrm>
           <a:prstGeom prst="rect">
             <a:avLst/>
@@ -5872,8 +6238,8 @@
         </p:nvSpPr>
         <p:spPr>
           <a:xfrm>
-            <a:off x="6217920" y="3886200"/>
-            <a:ext cx="5577840" cy="2331720"/>
+            <a:off x="6208776" y="3886200"/>
+            <a:ext cx="5431536" cy="2331720"/>
           </a:xfrm>
           <a:prstGeom prst="roundRect">
             <a:avLst>
@@ -5906,7 +6272,7 @@
         </p:nvSpPr>
         <p:spPr>
           <a:xfrm>
-            <a:off x="6400800" y="4069080"/>
+            <a:off x="6391656" y="4069080"/>
             <a:ext cx="457200" cy="457200"/>
           </a:xfrm>
           <a:prstGeom prst="ellipse">
@@ -5926,7 +6292,7 @@
         </p:nvSpPr>
         <p:spPr>
           <a:xfrm>
-            <a:off x="6400800" y="4069080"/>
+            <a:off x="6391656" y="4069080"/>
             <a:ext cx="457200" cy="457200"/>
           </a:xfrm>
           <a:prstGeom prst="rect">
@@ -5965,8 +6331,8 @@
         </p:nvSpPr>
         <p:spPr>
           <a:xfrm>
-            <a:off x="6995160" y="3995928"/>
-            <a:ext cx="4663440" cy="2112264"/>
+            <a:off x="6986016" y="3995928"/>
+            <a:ext cx="4517136" cy="2112264"/>
           </a:xfrm>
           <a:prstGeom prst="rect">
             <a:avLst/>
@@ -5995,6 +6361,54 @@
               <a:t>implantação assistida</a:t>
             </a:r>
             <a:endParaRPr lang="en-US" sz="1800" dirty="0"/>
+          </a:p>
+        </p:txBody>
+      </p:sp>
+      <p:sp>
+        <p:nvSpPr>
+          <p:cNvPr id="25" name="Slide Number Placeholder 0"/>
+          <p:cNvSpPr>
+            <a:spLocks noGrp="1"/>
+          </p:cNvSpPr>
+          <p:nvPr>
+            <p:ph type="sldNum" sz="quarter" idx="4294967295"/>
+          </p:nvPr>
+        </p:nvSpPr>
+        <p:spPr>
+          <a:xfrm>
+            <a:off x="11292840" y="6556248"/>
+            <a:ext cx="548640" cy="256032"/>
+          </a:xfrm>
+          <a:prstGeom prst="rect">
+            <a:avLst/>
+          </a:prstGeom>
+          <a:extLst>
+            <a:ext uri="{C572A759-6A51-4108-AA02-DFA0A04FC94B}">
+              <ma14:wrappingTextBoxFlag xmlns:ma14="http://schemas.microsoft.com/office/mac/drawingml/2011/main" val="0"/>
+            </a:ext>
+          </a:extLst>
+        </p:spPr>
+        <p:txBody>
+          <a:bodyPr/>
+          <a:lstStyle>
+            <a:lvl1pPr>
+              <a:defRPr sz="900">
+                <a:solidFill>
+                  <a:srgbClr val="1B3A6B"/>
+                </a:solidFill>
+                <a:latin typeface="Arial"/>
+                <a:ea typeface="Arial"/>
+                <a:cs typeface="Arial"/>
+              </a:defRPr>
+            </a:lvl1pPr>
+          </a:lstStyle>
+          <a:p>
+            <a:pPr algn="r"/>
+            <a:fld id="{F7021451-1387-4CA6-816F-3879F97B5CBC}" type="slidenum">
+              <a:rPr b="1" lang="en-US"/>
+              <a:t>15</a:t>
+            </a:fld>
+            <a:endParaRPr lang="en-US"/>
           </a:p>
         </p:txBody>
       </p:sp>
@@ -6071,7 +6485,7 @@
         </p:blipFill>
         <p:spPr>
           <a:xfrm>
-            <a:off x="411480" y="6547104"/>
+            <a:off x="548640" y="6547104"/>
             <a:ext cx="274320" cy="274320"/>
           </a:xfrm>
           <a:prstGeom prst="rect">
@@ -6087,7 +6501,7 @@
         </p:nvSpPr>
         <p:spPr>
           <a:xfrm>
-            <a:off x="749808" y="6528816"/>
+            <a:off x="886968" y="6528816"/>
             <a:ext cx="6400800" cy="310896"/>
           </a:xfrm>
           <a:prstGeom prst="rect">
@@ -6127,7 +6541,7 @@
         <p:spPr>
           <a:xfrm>
             <a:off x="7132320" y="6528816"/>
-            <a:ext cx="4663440" cy="310896"/>
+            <a:ext cx="4023360" cy="310896"/>
           </a:xfrm>
           <a:prstGeom prst="rect">
             <a:avLst/>
@@ -6165,7 +6579,7 @@
         </p:nvSpPr>
         <p:spPr>
           <a:xfrm>
-            <a:off x="411480" y="384048"/>
+            <a:off x="548640" y="384048"/>
             <a:ext cx="82296" cy="658368"/>
           </a:xfrm>
           <a:prstGeom prst="rect">
@@ -6185,7 +6599,7 @@
         </p:nvSpPr>
         <p:spPr>
           <a:xfrm>
-            <a:off x="640080" y="292608"/>
+            <a:off x="777240" y="292608"/>
             <a:ext cx="10972800" cy="274320"/>
           </a:xfrm>
           <a:prstGeom prst="rect">
@@ -6224,8 +6638,8 @@
         </p:nvSpPr>
         <p:spPr>
           <a:xfrm>
-            <a:off x="640080" y="530352"/>
-            <a:ext cx="11155680" cy="566928"/>
+            <a:off x="777240" y="530352"/>
+            <a:ext cx="10881360" cy="566928"/>
           </a:xfrm>
           <a:prstGeom prst="rect">
             <a:avLst/>
@@ -6265,8 +6679,8 @@
         </p:nvSpPr>
         <p:spPr>
           <a:xfrm>
-            <a:off x="411480" y="1325880"/>
-            <a:ext cx="11384280" cy="4937760"/>
+            <a:off x="548640" y="1325880"/>
+            <a:ext cx="11091672" cy="4937760"/>
           </a:xfrm>
           <a:prstGeom prst="roundRect">
             <a:avLst>
@@ -6287,8 +6701,8 @@
         </p:nvSpPr>
         <p:spPr>
           <a:xfrm>
-            <a:off x="731520" y="1554480"/>
-            <a:ext cx="10744200" cy="4480560"/>
+            <a:off x="868680" y="1554480"/>
+            <a:ext cx="10451592" cy="4480560"/>
           </a:xfrm>
           <a:prstGeom prst="rect">
             <a:avLst/>
@@ -6332,6 +6746,54 @@
               <a:t>Ver briefing (aula 1) e rubrica em 04-avaliacao-e-certificacao.md.</a:t>
             </a:r>
             <a:endParaRPr lang="en-US" sz="1300" dirty="0"/>
+          </a:p>
+        </p:txBody>
+      </p:sp>
+      <p:sp>
+        <p:nvSpPr>
+          <p:cNvPr id="25" name="Slide Number Placeholder 0"/>
+          <p:cNvSpPr>
+            <a:spLocks noGrp="1"/>
+          </p:cNvSpPr>
+          <p:nvPr>
+            <p:ph type="sldNum" sz="quarter" idx="4294967295"/>
+          </p:nvPr>
+        </p:nvSpPr>
+        <p:spPr>
+          <a:xfrm>
+            <a:off x="11292840" y="6556248"/>
+            <a:ext cx="548640" cy="256032"/>
+          </a:xfrm>
+          <a:prstGeom prst="rect">
+            <a:avLst/>
+          </a:prstGeom>
+          <a:extLst>
+            <a:ext uri="{C572A759-6A51-4108-AA02-DFA0A04FC94B}">
+              <ma14:wrappingTextBoxFlag xmlns:ma14="http://schemas.microsoft.com/office/mac/drawingml/2011/main" val="0"/>
+            </a:ext>
+          </a:extLst>
+        </p:spPr>
+        <p:txBody>
+          <a:bodyPr/>
+          <a:lstStyle>
+            <a:lvl1pPr>
+              <a:defRPr sz="900">
+                <a:solidFill>
+                  <a:srgbClr val="1B3A6B"/>
+                </a:solidFill>
+                <a:latin typeface="Arial"/>
+                <a:ea typeface="Arial"/>
+                <a:cs typeface="Arial"/>
+              </a:defRPr>
+            </a:lvl1pPr>
+          </a:lstStyle>
+          <a:p>
+            <a:pPr algn="r"/>
+            <a:fld id="{F7021451-1387-4CA6-816F-3879F97B5CBC}" type="slidenum">
+              <a:rPr b="1" lang="en-US"/>
+              <a:t>16</a:t>
+            </a:fld>
+            <a:endParaRPr lang="en-US"/>
           </a:p>
         </p:txBody>
       </p:sp>
@@ -6395,6 +6857,45 @@
         </p:nvSpPr>
         <p:spPr>
           <a:xfrm>
+            <a:off x="457200" y="548640"/>
+            <a:ext cx="3474720" cy="1737360"/>
+          </a:xfrm>
+          <a:prstGeom prst="rect">
+            <a:avLst/>
+          </a:prstGeom>
+          <a:noFill/>
+          <a:ln/>
+        </p:spPr>
+        <p:txBody>
+          <a:bodyPr wrap="square" rtlCol="0" anchor="ctr"/>
+          <a:lstStyle/>
+          <a:p>
+            <a:pPr indent="0" marL="0">
+              <a:buNone/>
+            </a:pPr>
+            <a:r>
+              <a:rPr lang="en-US" sz="11000" b="1" dirty="0">
+                <a:solidFill>
+                  <a:srgbClr val="11396F"/>
+                </a:solidFill>
+                <a:latin typeface="Arial" pitchFamily="34" charset="0"/>
+                <a:ea typeface="Arial" pitchFamily="34" charset="-122"/>
+                <a:cs typeface="Arial" pitchFamily="34" charset="-120"/>
+              </a:rPr>
+              <a:t>01</a:t>
+            </a:r>
+            <a:endParaRPr lang="en-US" sz="11000" dirty="0"/>
+          </a:p>
+        </p:txBody>
+      </p:sp>
+      <p:sp>
+        <p:nvSpPr>
+          <p:cNvPr id="4" name="Text 2"/>
+          <p:cNvSpPr/>
+          <p:nvPr/>
+        </p:nvSpPr>
+        <p:spPr>
+          <a:xfrm>
             <a:off x="548640" y="2194560"/>
             <a:ext cx="3291840" cy="548640"/>
           </a:xfrm>
@@ -6428,7 +6929,46 @@
       </p:sp>
       <p:sp>
         <p:nvSpPr>
-          <p:cNvPr id="4" name="Text 2"/>
+          <p:cNvPr id="5" name="Text 3"/>
+          <p:cNvSpPr/>
+          <p:nvPr/>
+        </p:nvSpPr>
+        <p:spPr>
+          <a:xfrm>
+            <a:off x="548640" y="3200400"/>
+            <a:ext cx="3383280" cy="457200"/>
+          </a:xfrm>
+          <a:prstGeom prst="rect">
+            <a:avLst/>
+          </a:prstGeom>
+          <a:noFill/>
+          <a:ln/>
+        </p:spPr>
+        <p:txBody>
+          <a:bodyPr wrap="square" rtlCol="0" anchor="ctr"/>
+          <a:lstStyle/>
+          <a:p>
+            <a:pPr indent="0" marL="0">
+              <a:buNone/>
+            </a:pPr>
+            <a:r>
+              <a:rPr lang="en-US" sz="1100" dirty="0">
+                <a:solidFill>
+                  <a:srgbClr val="C7D2E3"/>
+                </a:solidFill>
+                <a:latin typeface="Arial" pitchFamily="34" charset="0"/>
+                <a:ea typeface="Arial" pitchFamily="34" charset="-122"/>
+                <a:cs typeface="Arial" pitchFamily="34" charset="-120"/>
+              </a:rPr>
+              <a:t>M12 · Etapa 4 · Gestão e estratégia</a:t>
+            </a:r>
+            <a:endParaRPr lang="en-US" sz="1100" dirty="0"/>
+          </a:p>
+        </p:txBody>
+      </p:sp>
+      <p:sp>
+        <p:nvSpPr>
+          <p:cNvPr id="6" name="Text 4"/>
           <p:cNvSpPr/>
           <p:nvPr/>
         </p:nvSpPr>
@@ -6467,7 +7007,7 @@
       </p:sp>
       <p:pic>
         <p:nvPicPr>
-          <p:cNvPr id="5" name="Image 0" descr="/www/wwwroot/rexar/gdsolar/docs/curso/slides/assets/logo-gdsolar.png">    </p:cNvPr>
+          <p:cNvPr id="7" name="Image 0" descr="/www/wwwroot/rexar/gdsolar/docs/curso/slides/assets/logo-gdsolar.png">    </p:cNvPr>
           <p:cNvPicPr>
             <a:picLocks noChangeAspect="1"/>
           </p:cNvPicPr>
@@ -6491,7 +7031,7 @@
       </p:pic>
       <p:sp>
         <p:nvSpPr>
-          <p:cNvPr id="6" name="Text 3"/>
+          <p:cNvPr id="8" name="Text 5"/>
           <p:cNvSpPr/>
           <p:nvPr/>
         </p:nvSpPr>
@@ -6532,7 +7072,7 @@
       </p:sp>
       <p:sp>
         <p:nvSpPr>
-          <p:cNvPr id="7" name="Text 4"/>
+          <p:cNvPr id="9" name="Text 6"/>
           <p:cNvSpPr/>
           <p:nvPr/>
         </p:nvSpPr>
@@ -6573,7 +7113,7 @@
       </p:sp>
       <p:sp>
         <p:nvSpPr>
-          <p:cNvPr id="8" name="Text 5"/>
+          <p:cNvPr id="10" name="Text 7"/>
           <p:cNvSpPr/>
           <p:nvPr/>
         </p:nvSpPr>
@@ -6731,7 +7271,7 @@
         </p:blipFill>
         <p:spPr>
           <a:xfrm>
-            <a:off x="411480" y="6547104"/>
+            <a:off x="548640" y="6547104"/>
             <a:ext cx="274320" cy="274320"/>
           </a:xfrm>
           <a:prstGeom prst="rect">
@@ -6747,7 +7287,7 @@
         </p:nvSpPr>
         <p:spPr>
           <a:xfrm>
-            <a:off x="749808" y="6528816"/>
+            <a:off x="886968" y="6528816"/>
             <a:ext cx="6400800" cy="310896"/>
           </a:xfrm>
           <a:prstGeom prst="rect">
@@ -6787,7 +7327,7 @@
         <p:spPr>
           <a:xfrm>
             <a:off x="7132320" y="6528816"/>
-            <a:ext cx="4663440" cy="310896"/>
+            <a:ext cx="4023360" cy="310896"/>
           </a:xfrm>
           <a:prstGeom prst="rect">
             <a:avLst/>
@@ -6825,7 +7365,7 @@
         </p:nvSpPr>
         <p:spPr>
           <a:xfrm>
-            <a:off x="411480" y="384048"/>
+            <a:off x="548640" y="384048"/>
             <a:ext cx="82296" cy="658368"/>
           </a:xfrm>
           <a:prstGeom prst="rect">
@@ -6845,7 +7385,7 @@
         </p:nvSpPr>
         <p:spPr>
           <a:xfrm>
-            <a:off x="640080" y="292608"/>
+            <a:off x="777240" y="292608"/>
             <a:ext cx="10972800" cy="274320"/>
           </a:xfrm>
           <a:prstGeom prst="rect">
@@ -6884,8 +7424,8 @@
         </p:nvSpPr>
         <p:spPr>
           <a:xfrm>
-            <a:off x="640080" y="530352"/>
-            <a:ext cx="11155680" cy="566928"/>
+            <a:off x="777240" y="530352"/>
+            <a:ext cx="10881360" cy="566928"/>
           </a:xfrm>
           <a:prstGeom prst="rect">
             <a:avLst/>
@@ -6926,7 +7466,7 @@
         <p:spPr>
           <a:xfrm>
             <a:off x="548640" y="1325880"/>
-            <a:ext cx="11155680" cy="4937760"/>
+            <a:ext cx="5486400" cy="4937760"/>
           </a:xfrm>
           <a:prstGeom prst="rect">
             <a:avLst/>
@@ -6947,7 +7487,7 @@
               <a:buNone/>
             </a:pPr>
             <a:r>
-              <a:rPr lang="en-US" sz="1300" dirty="0">
+              <a:rPr lang="en-US" sz="1800" dirty="0">
                 <a:solidFill>
                   <a:srgbClr val="1F2937"/>
                 </a:solidFill>
@@ -6957,7 +7497,7 @@
               </a:rPr>
               <a:t>☐ Identidade visual da sua empresa aplicada</a:t>
             </a:r>
-            <a:endParaRPr lang="en-US" sz="1300" dirty="0"/>
+            <a:endParaRPr lang="en-US" sz="1800" dirty="0"/>
           </a:p>
           <a:p>
             <a:pPr indent="0" marL="0">
@@ -6967,7 +7507,7 @@
               <a:buNone/>
             </a:pPr>
             <a:r>
-              <a:rPr lang="en-US" sz="1300" dirty="0">
+              <a:rPr lang="en-US" sz="1800" dirty="0">
                 <a:solidFill>
                   <a:srgbClr val="1F2937"/>
                 </a:solidFill>
@@ -6977,7 +7517,7 @@
               </a:rPr>
               <a:t>☐ 2 usinas (a do M4 + uma nova), com produtor, proposta e 3 meses de geração</a:t>
             </a:r>
-            <a:endParaRPr lang="en-US" sz="1300" dirty="0"/>
+            <a:endParaRPr lang="en-US" sz="1800" dirty="0"/>
           </a:p>
           <a:p>
             <a:pPr indent="0" marL="0">
@@ -6987,7 +7527,7 @@
               <a:buNone/>
             </a:pPr>
             <a:r>
-              <a:rPr lang="en-US" sz="1300" dirty="0">
+              <a:rPr lang="en-US" sz="1800" dirty="0">
                 <a:solidFill>
                   <a:srgbClr val="1F2937"/>
                 </a:solidFill>
@@ -6997,7 +7537,7 @@
               </a:rPr>
               <a:t>☐ 20+ clientes (empresas e residências) com UC, proposta, contrato, vínculo e convite</a:t>
             </a:r>
-            <a:endParaRPr lang="en-US" sz="1300" dirty="0"/>
+            <a:endParaRPr lang="en-US" sz="1800" dirty="0"/>
           </a:p>
           <a:p>
             <a:pPr indent="0" marL="0">
@@ -7007,7 +7547,7 @@
               <a:buNone/>
             </a:pPr>
             <a:r>
-              <a:rPr lang="en-US" sz="1300" dirty="0">
+              <a:rPr lang="en-US" sz="1800" dirty="0">
                 <a:solidFill>
                   <a:srgbClr val="1F2937"/>
                 </a:solidFill>
@@ -7017,8 +7557,32 @@
               </a:rPr>
               <a:t>☐ Ocupação de 90–98% em cada usina; nenhum cliente ≥ 25%</a:t>
             </a:r>
-            <a:endParaRPr lang="en-US" sz="1300" dirty="0"/>
-          </a:p>
+            <a:endParaRPr lang="en-US" sz="1800" dirty="0"/>
+          </a:p>
+        </p:txBody>
+      </p:sp>
+      <p:sp>
+        <p:nvSpPr>
+          <p:cNvPr id="10" name="Text 7"/>
+          <p:cNvSpPr/>
+          <p:nvPr/>
+        </p:nvSpPr>
+        <p:spPr>
+          <a:xfrm>
+            <a:off x="6263640" y="1325880"/>
+            <a:ext cx="5486400" cy="4937760"/>
+          </a:xfrm>
+          <a:prstGeom prst="rect">
+            <a:avLst/>
+          </a:prstGeom>
+          <a:noFill/>
+          <a:ln/>
+        </p:spPr>
+        <p:txBody>
+          <a:bodyPr wrap="square" rtlCol="0" anchor="t">
+            <a:normAutofit/>
+          </a:bodyPr>
+          <a:lstStyle/>
           <a:p>
             <a:pPr indent="0" marL="0">
               <a:spcAft>
@@ -7027,7 +7591,7 @@
               <a:buNone/>
             </a:pPr>
             <a:r>
-              <a:rPr lang="en-US" sz="1300" dirty="0">
+              <a:rPr lang="en-US" sz="1800" dirty="0">
                 <a:solidFill>
                   <a:srgbClr val="1F2937"/>
                 </a:solidFill>
@@ -7037,7 +7601,7 @@
               </a:rPr>
               <a:t>☐ 3 meses de faturas revisadas e aprovadas (com pendências resolvidas e justificadas)</a:t>
             </a:r>
-            <a:endParaRPr lang="en-US" sz="1300" dirty="0"/>
+            <a:endParaRPr lang="en-US" sz="1800" dirty="0"/>
           </a:p>
           <a:p>
             <a:pPr indent="0" marL="0">
@@ -7047,7 +7611,7 @@
               <a:buNone/>
             </a:pPr>
             <a:r>
-              <a:rPr lang="en-US" sz="1300" dirty="0">
+              <a:rPr lang="en-US" sz="1800" dirty="0">
                 <a:solidFill>
                   <a:srgbClr val="1F2937"/>
                 </a:solidFill>
@@ -7057,7 +7621,7 @@
               </a:rPr>
               <a:t>☐ 3 meses de cobranças: emitidas, pagas, 1+ ajuste, 1+ vencida tratada</a:t>
             </a:r>
-            <a:endParaRPr lang="en-US" sz="1300" dirty="0"/>
+            <a:endParaRPr lang="en-US" sz="1800" dirty="0"/>
           </a:p>
           <a:p>
             <a:pPr indent="0" marL="0">
@@ -7067,7 +7631,7 @@
               <a:buNone/>
             </a:pPr>
             <a:r>
-              <a:rPr lang="en-US" sz="1300" dirty="0">
+              <a:rPr lang="en-US" sz="1800" dirty="0">
                 <a:solidFill>
                   <a:srgbClr val="1F2937"/>
                 </a:solidFill>
@@ -7077,7 +7641,55 @@
               </a:rPr>
               <a:t>☐ Alertas críticos zerados no fechamento de cada mês</a:t>
             </a:r>
-            <a:endParaRPr lang="en-US" sz="1300" dirty="0"/>
+            <a:endParaRPr lang="en-US" sz="1800" dirty="0"/>
+          </a:p>
+        </p:txBody>
+      </p:sp>
+      <p:sp>
+        <p:nvSpPr>
+          <p:cNvPr id="25" name="Slide Number Placeholder 0"/>
+          <p:cNvSpPr>
+            <a:spLocks noGrp="1"/>
+          </p:cNvSpPr>
+          <p:nvPr>
+            <p:ph type="sldNum" sz="quarter" idx="4294967295"/>
+          </p:nvPr>
+        </p:nvSpPr>
+        <p:spPr>
+          <a:xfrm>
+            <a:off x="11292840" y="6556248"/>
+            <a:ext cx="548640" cy="256032"/>
+          </a:xfrm>
+          <a:prstGeom prst="rect">
+            <a:avLst/>
+          </a:prstGeom>
+          <a:extLst>
+            <a:ext uri="{C572A759-6A51-4108-AA02-DFA0A04FC94B}">
+              <ma14:wrappingTextBoxFlag xmlns:ma14="http://schemas.microsoft.com/office/mac/drawingml/2011/main" val="0"/>
+            </a:ext>
+          </a:extLst>
+        </p:spPr>
+        <p:txBody>
+          <a:bodyPr/>
+          <a:lstStyle>
+            <a:lvl1pPr>
+              <a:defRPr sz="900">
+                <a:solidFill>
+                  <a:srgbClr val="1B3A6B"/>
+                </a:solidFill>
+                <a:latin typeface="Arial"/>
+                <a:ea typeface="Arial"/>
+                <a:cs typeface="Arial"/>
+              </a:defRPr>
+            </a:lvl1pPr>
+          </a:lstStyle>
+          <a:p>
+            <a:pPr algn="r"/>
+            <a:fld id="{F7021451-1387-4CA6-816F-3879F97B5CBC}" type="slidenum">
+              <a:rPr b="1" lang="en-US"/>
+              <a:t>3</a:t>
+            </a:fld>
+            <a:endParaRPr lang="en-US"/>
           </a:p>
         </p:txBody>
       </p:sp>
@@ -7154,7 +7766,7 @@
         </p:blipFill>
         <p:spPr>
           <a:xfrm>
-            <a:off x="411480" y="6547104"/>
+            <a:off x="548640" y="6547104"/>
             <a:ext cx="274320" cy="274320"/>
           </a:xfrm>
           <a:prstGeom prst="rect">
@@ -7170,7 +7782,7 @@
         </p:nvSpPr>
         <p:spPr>
           <a:xfrm>
-            <a:off x="749808" y="6528816"/>
+            <a:off x="886968" y="6528816"/>
             <a:ext cx="6400800" cy="310896"/>
           </a:xfrm>
           <a:prstGeom prst="rect">
@@ -7210,7 +7822,7 @@
         <p:spPr>
           <a:xfrm>
             <a:off x="7132320" y="6528816"/>
-            <a:ext cx="4663440" cy="310896"/>
+            <a:ext cx="4023360" cy="310896"/>
           </a:xfrm>
           <a:prstGeom prst="rect">
             <a:avLst/>
@@ -7248,7 +7860,7 @@
         </p:nvSpPr>
         <p:spPr>
           <a:xfrm>
-            <a:off x="411480" y="384048"/>
+            <a:off x="548640" y="384048"/>
             <a:ext cx="82296" cy="658368"/>
           </a:xfrm>
           <a:prstGeom prst="rect">
@@ -7268,7 +7880,7 @@
         </p:nvSpPr>
         <p:spPr>
           <a:xfrm>
-            <a:off x="640080" y="292608"/>
+            <a:off x="777240" y="292608"/>
             <a:ext cx="10972800" cy="274320"/>
           </a:xfrm>
           <a:prstGeom prst="rect">
@@ -7307,8 +7919,8 @@
         </p:nvSpPr>
         <p:spPr>
           <a:xfrm>
-            <a:off x="640080" y="530352"/>
-            <a:ext cx="11155680" cy="566928"/>
+            <a:off x="777240" y="530352"/>
+            <a:ext cx="10881360" cy="566928"/>
           </a:xfrm>
           <a:prstGeom prst="rect">
             <a:avLst/>
@@ -7348,8 +7960,8 @@
         </p:nvSpPr>
         <p:spPr>
           <a:xfrm>
-            <a:off x="411480" y="1325880"/>
-            <a:ext cx="3642360" cy="2331720"/>
+            <a:off x="548640" y="1325880"/>
+            <a:ext cx="3544824" cy="2331720"/>
           </a:xfrm>
           <a:prstGeom prst="roundRect">
             <a:avLst>
@@ -7382,7 +7994,7 @@
         </p:nvSpPr>
         <p:spPr>
           <a:xfrm>
-            <a:off x="594360" y="1508760"/>
+            <a:off x="731520" y="1508760"/>
             <a:ext cx="457200" cy="457200"/>
           </a:xfrm>
           <a:prstGeom prst="ellipse">
@@ -7402,7 +8014,7 @@
         </p:nvSpPr>
         <p:spPr>
           <a:xfrm>
-            <a:off x="594360" y="1508760"/>
+            <a:off x="731520" y="1508760"/>
             <a:ext cx="457200" cy="457200"/>
           </a:xfrm>
           <a:prstGeom prst="rect">
@@ -7441,8 +8053,8 @@
         </p:nvSpPr>
         <p:spPr>
           <a:xfrm>
-            <a:off x="1188720" y="1435608"/>
-            <a:ext cx="2727960" cy="2112264"/>
+            <a:off x="1325880" y="1435608"/>
+            <a:ext cx="2630424" cy="2112264"/>
           </a:xfrm>
           <a:prstGeom prst="rect">
             <a:avLst/>
@@ -7482,8 +8094,8 @@
         </p:nvSpPr>
         <p:spPr>
           <a:xfrm>
-            <a:off x="4282440" y="1325880"/>
-            <a:ext cx="3642360" cy="2331720"/>
+            <a:off x="4322064" y="1325880"/>
+            <a:ext cx="3544824" cy="2331720"/>
           </a:xfrm>
           <a:prstGeom prst="roundRect">
             <a:avLst>
@@ -7516,7 +8128,7 @@
         </p:nvSpPr>
         <p:spPr>
           <a:xfrm>
-            <a:off x="4465320" y="1508760"/>
+            <a:off x="4504944" y="1508760"/>
             <a:ext cx="457200" cy="457200"/>
           </a:xfrm>
           <a:prstGeom prst="ellipse">
@@ -7536,7 +8148,7 @@
         </p:nvSpPr>
         <p:spPr>
           <a:xfrm>
-            <a:off x="4465320" y="1508760"/>
+            <a:off x="4504944" y="1508760"/>
             <a:ext cx="457200" cy="457200"/>
           </a:xfrm>
           <a:prstGeom prst="rect">
@@ -7575,8 +8187,8 @@
         </p:nvSpPr>
         <p:spPr>
           <a:xfrm>
-            <a:off x="5059680" y="1435608"/>
-            <a:ext cx="2727960" cy="2112264"/>
+            <a:off x="5099304" y="1435608"/>
+            <a:ext cx="2630424" cy="2112264"/>
           </a:xfrm>
           <a:prstGeom prst="rect">
             <a:avLst/>
@@ -7616,8 +8228,8 @@
         </p:nvSpPr>
         <p:spPr>
           <a:xfrm>
-            <a:off x="8153400" y="1325880"/>
-            <a:ext cx="3642360" cy="2331720"/>
+            <a:off x="8095488" y="1325880"/>
+            <a:ext cx="3544824" cy="2331720"/>
           </a:xfrm>
           <a:prstGeom prst="roundRect">
             <a:avLst>
@@ -7650,7 +8262,7 @@
         </p:nvSpPr>
         <p:spPr>
           <a:xfrm>
-            <a:off x="8336280" y="1508760"/>
+            <a:off x="8278368" y="1508760"/>
             <a:ext cx="457200" cy="457200"/>
           </a:xfrm>
           <a:prstGeom prst="ellipse">
@@ -7670,7 +8282,7 @@
         </p:nvSpPr>
         <p:spPr>
           <a:xfrm>
-            <a:off x="8336280" y="1508760"/>
+            <a:off x="8278368" y="1508760"/>
             <a:ext cx="457200" cy="457200"/>
           </a:xfrm>
           <a:prstGeom prst="rect">
@@ -7709,8 +8321,8 @@
         </p:nvSpPr>
         <p:spPr>
           <a:xfrm>
-            <a:off x="8930640" y="1435608"/>
-            <a:ext cx="2727960" cy="2112264"/>
+            <a:off x="8872728" y="1435608"/>
+            <a:ext cx="2630424" cy="2112264"/>
           </a:xfrm>
           <a:prstGeom prst="rect">
             <a:avLst/>
@@ -7750,8 +8362,8 @@
         </p:nvSpPr>
         <p:spPr>
           <a:xfrm>
-            <a:off x="411480" y="3886200"/>
-            <a:ext cx="3642360" cy="2331720"/>
+            <a:off x="548640" y="3886200"/>
+            <a:ext cx="3544824" cy="2331720"/>
           </a:xfrm>
           <a:prstGeom prst="roundRect">
             <a:avLst>
@@ -7784,7 +8396,7 @@
         </p:nvSpPr>
         <p:spPr>
           <a:xfrm>
-            <a:off x="594360" y="4069080"/>
+            <a:off x="731520" y="4069080"/>
             <a:ext cx="457200" cy="457200"/>
           </a:xfrm>
           <a:prstGeom prst="ellipse">
@@ -7804,7 +8416,7 @@
         </p:nvSpPr>
         <p:spPr>
           <a:xfrm>
-            <a:off x="594360" y="4069080"/>
+            <a:off x="731520" y="4069080"/>
             <a:ext cx="457200" cy="457200"/>
           </a:xfrm>
           <a:prstGeom prst="rect">
@@ -7843,8 +8455,8 @@
         </p:nvSpPr>
         <p:spPr>
           <a:xfrm>
-            <a:off x="1188720" y="3995928"/>
-            <a:ext cx="2727960" cy="2112264"/>
+            <a:off x="1325880" y="3995928"/>
+            <a:ext cx="2630424" cy="2112264"/>
           </a:xfrm>
           <a:prstGeom prst="rect">
             <a:avLst/>
@@ -7884,8 +8496,8 @@
         </p:nvSpPr>
         <p:spPr>
           <a:xfrm>
-            <a:off x="4282440" y="3886200"/>
-            <a:ext cx="3642360" cy="2331720"/>
+            <a:off x="4322064" y="3886200"/>
+            <a:ext cx="3544824" cy="2331720"/>
           </a:xfrm>
           <a:prstGeom prst="roundRect">
             <a:avLst>
@@ -7918,7 +8530,7 @@
         </p:nvSpPr>
         <p:spPr>
           <a:xfrm>
-            <a:off x="4465320" y="4069080"/>
+            <a:off x="4504944" y="4069080"/>
             <a:ext cx="457200" cy="457200"/>
           </a:xfrm>
           <a:prstGeom prst="ellipse">
@@ -7938,7 +8550,7 @@
         </p:nvSpPr>
         <p:spPr>
           <a:xfrm>
-            <a:off x="4465320" y="4069080"/>
+            <a:off x="4504944" y="4069080"/>
             <a:ext cx="457200" cy="457200"/>
           </a:xfrm>
           <a:prstGeom prst="rect">
@@ -7977,8 +8589,8 @@
         </p:nvSpPr>
         <p:spPr>
           <a:xfrm>
-            <a:off x="5059680" y="3995928"/>
-            <a:ext cx="2727960" cy="2112264"/>
+            <a:off x="5099304" y="3995928"/>
+            <a:ext cx="2630424" cy="2112264"/>
           </a:xfrm>
           <a:prstGeom prst="rect">
             <a:avLst/>
@@ -8018,8 +8630,8 @@
         </p:nvSpPr>
         <p:spPr>
           <a:xfrm>
-            <a:off x="8153400" y="3886200"/>
-            <a:ext cx="3642360" cy="2331720"/>
+            <a:off x="8095488" y="3886200"/>
+            <a:ext cx="3544824" cy="2331720"/>
           </a:xfrm>
           <a:prstGeom prst="roundRect">
             <a:avLst>
@@ -8052,7 +8664,7 @@
         </p:nvSpPr>
         <p:spPr>
           <a:xfrm>
-            <a:off x="8336280" y="4069080"/>
+            <a:off x="8278368" y="4069080"/>
             <a:ext cx="457200" cy="457200"/>
           </a:xfrm>
           <a:prstGeom prst="ellipse">
@@ -8072,7 +8684,7 @@
         </p:nvSpPr>
         <p:spPr>
           <a:xfrm>
-            <a:off x="8336280" y="4069080"/>
+            <a:off x="8278368" y="4069080"/>
             <a:ext cx="457200" cy="457200"/>
           </a:xfrm>
           <a:prstGeom prst="rect">
@@ -8111,8 +8723,8 @@
         </p:nvSpPr>
         <p:spPr>
           <a:xfrm>
-            <a:off x="8930640" y="3995928"/>
-            <a:ext cx="2727960" cy="2112264"/>
+            <a:off x="8872728" y="3995928"/>
+            <a:ext cx="2630424" cy="2112264"/>
           </a:xfrm>
           <a:prstGeom prst="rect">
             <a:avLst/>
@@ -8141,6 +8753,54 @@
               <a:t>Vídeo de até 5 minutos apresentando a empresa (opcional no autoestudo)</a:t>
             </a:r>
             <a:endParaRPr lang="en-US" sz="1800" dirty="0"/>
+          </a:p>
+        </p:txBody>
+      </p:sp>
+      <p:sp>
+        <p:nvSpPr>
+          <p:cNvPr id="25" name="Slide Number Placeholder 0"/>
+          <p:cNvSpPr>
+            <a:spLocks noGrp="1"/>
+          </p:cNvSpPr>
+          <p:nvPr>
+            <p:ph type="sldNum" sz="quarter" idx="4294967295"/>
+          </p:nvPr>
+        </p:nvSpPr>
+        <p:spPr>
+          <a:xfrm>
+            <a:off x="11292840" y="6556248"/>
+            <a:ext cx="548640" cy="256032"/>
+          </a:xfrm>
+          <a:prstGeom prst="rect">
+            <a:avLst/>
+          </a:prstGeom>
+          <a:extLst>
+            <a:ext uri="{C572A759-6A51-4108-AA02-DFA0A04FC94B}">
+              <ma14:wrappingTextBoxFlag xmlns:ma14="http://schemas.microsoft.com/office/mac/drawingml/2011/main" val="0"/>
+            </a:ext>
+          </a:extLst>
+        </p:spPr>
+        <p:txBody>
+          <a:bodyPr/>
+          <a:lstStyle>
+            <a:lvl1pPr>
+              <a:defRPr sz="900">
+                <a:solidFill>
+                  <a:srgbClr val="1B3A6B"/>
+                </a:solidFill>
+                <a:latin typeface="Arial"/>
+                <a:ea typeface="Arial"/>
+                <a:cs typeface="Arial"/>
+              </a:defRPr>
+            </a:lvl1pPr>
+          </a:lstStyle>
+          <a:p>
+            <a:pPr algn="r"/>
+            <a:fld id="{F7021451-1387-4CA6-816F-3879F97B5CBC}" type="slidenum">
+              <a:rPr b="1" lang="en-US"/>
+              <a:t>4</a:t>
+            </a:fld>
+            <a:endParaRPr lang="en-US"/>
           </a:p>
         </p:txBody>
       </p:sp>
@@ -8217,7 +8877,7 @@
         </p:blipFill>
         <p:spPr>
           <a:xfrm>
-            <a:off x="411480" y="6547104"/>
+            <a:off x="548640" y="6547104"/>
             <a:ext cx="274320" cy="274320"/>
           </a:xfrm>
           <a:prstGeom prst="rect">
@@ -8233,7 +8893,7 @@
         </p:nvSpPr>
         <p:spPr>
           <a:xfrm>
-            <a:off x="749808" y="6528816"/>
+            <a:off x="886968" y="6528816"/>
             <a:ext cx="6400800" cy="310896"/>
           </a:xfrm>
           <a:prstGeom prst="rect">
@@ -8273,7 +8933,7 @@
         <p:spPr>
           <a:xfrm>
             <a:off x="7132320" y="6528816"/>
-            <a:ext cx="4663440" cy="310896"/>
+            <a:ext cx="4023360" cy="310896"/>
           </a:xfrm>
           <a:prstGeom prst="rect">
             <a:avLst/>
@@ -8311,7 +8971,7 @@
         </p:nvSpPr>
         <p:spPr>
           <a:xfrm>
-            <a:off x="411480" y="384048"/>
+            <a:off x="548640" y="384048"/>
             <a:ext cx="82296" cy="658368"/>
           </a:xfrm>
           <a:prstGeom prst="rect">
@@ -8331,7 +8991,7 @@
         </p:nvSpPr>
         <p:spPr>
           <a:xfrm>
-            <a:off x="640080" y="292608"/>
+            <a:off x="777240" y="292608"/>
             <a:ext cx="10972800" cy="274320"/>
           </a:xfrm>
           <a:prstGeom prst="rect">
@@ -8370,8 +9030,8 @@
         </p:nvSpPr>
         <p:spPr>
           <a:xfrm>
-            <a:off x="640080" y="530352"/>
-            <a:ext cx="11155680" cy="566928"/>
+            <a:off x="777240" y="530352"/>
+            <a:ext cx="10881360" cy="566928"/>
           </a:xfrm>
           <a:prstGeom prst="rect">
             <a:avLst/>
@@ -8411,8 +9071,8 @@
         </p:nvSpPr>
         <p:spPr>
           <a:xfrm>
-            <a:off x="411480" y="1325880"/>
-            <a:ext cx="5577840" cy="4892040"/>
+            <a:off x="548640" y="1325880"/>
+            <a:ext cx="5431536" cy="4892040"/>
           </a:xfrm>
           <a:prstGeom prst="roundRect">
             <a:avLst>
@@ -8445,7 +9105,7 @@
         </p:nvSpPr>
         <p:spPr>
           <a:xfrm>
-            <a:off x="594360" y="1508760"/>
+            <a:off x="731520" y="1508760"/>
             <a:ext cx="457200" cy="457200"/>
           </a:xfrm>
           <a:prstGeom prst="ellipse">
@@ -8465,7 +9125,7 @@
         </p:nvSpPr>
         <p:spPr>
           <a:xfrm>
-            <a:off x="594360" y="1508760"/>
+            <a:off x="731520" y="1508760"/>
             <a:ext cx="457200" cy="457200"/>
           </a:xfrm>
           <a:prstGeom prst="rect">
@@ -8504,8 +9164,8 @@
         </p:nvSpPr>
         <p:spPr>
           <a:xfrm>
-            <a:off x="1188720" y="1435608"/>
-            <a:ext cx="4663440" cy="4672584"/>
+            <a:off x="1325880" y="1435608"/>
+            <a:ext cx="4517136" cy="4672584"/>
           </a:xfrm>
           <a:prstGeom prst="rect">
             <a:avLst/>
@@ -8545,8 +9205,8 @@
         </p:nvSpPr>
         <p:spPr>
           <a:xfrm>
-            <a:off x="6217920" y="1325880"/>
-            <a:ext cx="5577840" cy="4892040"/>
+            <a:off x="6208776" y="1325880"/>
+            <a:ext cx="5431536" cy="4892040"/>
           </a:xfrm>
           <a:prstGeom prst="roundRect">
             <a:avLst>
@@ -8579,7 +9239,7 @@
         </p:nvSpPr>
         <p:spPr>
           <a:xfrm>
-            <a:off x="6400800" y="1508760"/>
+            <a:off x="6391656" y="1508760"/>
             <a:ext cx="457200" cy="457200"/>
           </a:xfrm>
           <a:prstGeom prst="ellipse">
@@ -8599,7 +9259,7 @@
         </p:nvSpPr>
         <p:spPr>
           <a:xfrm>
-            <a:off x="6400800" y="1508760"/>
+            <a:off x="6391656" y="1508760"/>
             <a:ext cx="457200" cy="457200"/>
           </a:xfrm>
           <a:prstGeom prst="rect">
@@ -8638,8 +9298,8 @@
         </p:nvSpPr>
         <p:spPr>
           <a:xfrm>
-            <a:off x="6995160" y="1435608"/>
-            <a:ext cx="4663440" cy="4672584"/>
+            <a:off x="6986016" y="1435608"/>
+            <a:ext cx="4517136" cy="4672584"/>
           </a:xfrm>
           <a:prstGeom prst="rect">
             <a:avLst/>
@@ -8668,6 +9328,54 @@
               <a:t>Semana 2: relatórios, documentos, vídeo, revisão pela rubrica</a:t>
             </a:r>
             <a:endParaRPr lang="en-US" sz="1800" dirty="0"/>
+          </a:p>
+        </p:txBody>
+      </p:sp>
+      <p:sp>
+        <p:nvSpPr>
+          <p:cNvPr id="25" name="Slide Number Placeholder 0"/>
+          <p:cNvSpPr>
+            <a:spLocks noGrp="1"/>
+          </p:cNvSpPr>
+          <p:nvPr>
+            <p:ph type="sldNum" sz="quarter" idx="4294967295"/>
+          </p:nvPr>
+        </p:nvSpPr>
+        <p:spPr>
+          <a:xfrm>
+            <a:off x="11292840" y="6556248"/>
+            <a:ext cx="548640" cy="256032"/>
+          </a:xfrm>
+          <a:prstGeom prst="rect">
+            <a:avLst/>
+          </a:prstGeom>
+          <a:extLst>
+            <a:ext uri="{C572A759-6A51-4108-AA02-DFA0A04FC94B}">
+              <ma14:wrappingTextBoxFlag xmlns:ma14="http://schemas.microsoft.com/office/mac/drawingml/2011/main" val="0"/>
+            </a:ext>
+          </a:extLst>
+        </p:spPr>
+        <p:txBody>
+          <a:bodyPr/>
+          <a:lstStyle>
+            <a:lvl1pPr>
+              <a:defRPr sz="900">
+                <a:solidFill>
+                  <a:srgbClr val="1B3A6B"/>
+                </a:solidFill>
+                <a:latin typeface="Arial"/>
+                <a:ea typeface="Arial"/>
+                <a:cs typeface="Arial"/>
+              </a:defRPr>
+            </a:lvl1pPr>
+          </a:lstStyle>
+          <a:p>
+            <a:pPr algn="r"/>
+            <a:fld id="{F7021451-1387-4CA6-816F-3879F97B5CBC}" type="slidenum">
+              <a:rPr b="1" lang="en-US"/>
+              <a:t>5</a:t>
+            </a:fld>
+            <a:endParaRPr lang="en-US"/>
           </a:p>
         </p:txBody>
       </p:sp>
@@ -8731,6 +9439,45 @@
         </p:nvSpPr>
         <p:spPr>
           <a:xfrm>
+            <a:off x="457200" y="548640"/>
+            <a:ext cx="3474720" cy="1737360"/>
+          </a:xfrm>
+          <a:prstGeom prst="rect">
+            <a:avLst/>
+          </a:prstGeom>
+          <a:noFill/>
+          <a:ln/>
+        </p:spPr>
+        <p:txBody>
+          <a:bodyPr wrap="square" rtlCol="0" anchor="ctr"/>
+          <a:lstStyle/>
+          <a:p>
+            <a:pPr indent="0" marL="0">
+              <a:buNone/>
+            </a:pPr>
+            <a:r>
+              <a:rPr lang="en-US" sz="11000" b="1" dirty="0">
+                <a:solidFill>
+                  <a:srgbClr val="11396F"/>
+                </a:solidFill>
+                <a:latin typeface="Arial" pitchFamily="34" charset="0"/>
+                <a:ea typeface="Arial" pitchFamily="34" charset="-122"/>
+                <a:cs typeface="Arial" pitchFamily="34" charset="-120"/>
+              </a:rPr>
+              <a:t>02</a:t>
+            </a:r>
+            <a:endParaRPr lang="en-US" sz="11000" dirty="0"/>
+          </a:p>
+        </p:txBody>
+      </p:sp>
+      <p:sp>
+        <p:nvSpPr>
+          <p:cNvPr id="4" name="Text 2"/>
+          <p:cNvSpPr/>
+          <p:nvPr/>
+        </p:nvSpPr>
+        <p:spPr>
+          <a:xfrm>
             <a:off x="548640" y="2194560"/>
             <a:ext cx="3291840" cy="548640"/>
           </a:xfrm>
@@ -8764,7 +9511,46 @@
       </p:sp>
       <p:sp>
         <p:nvSpPr>
-          <p:cNvPr id="4" name="Text 2"/>
+          <p:cNvPr id="5" name="Text 3"/>
+          <p:cNvSpPr/>
+          <p:nvPr/>
+        </p:nvSpPr>
+        <p:spPr>
+          <a:xfrm>
+            <a:off x="548640" y="3200400"/>
+            <a:ext cx="3383280" cy="457200"/>
+          </a:xfrm>
+          <a:prstGeom prst="rect">
+            <a:avLst/>
+          </a:prstGeom>
+          <a:noFill/>
+          <a:ln/>
+        </p:spPr>
+        <p:txBody>
+          <a:bodyPr wrap="square" rtlCol="0" anchor="ctr"/>
+          <a:lstStyle/>
+          <a:p>
+            <a:pPr indent="0" marL="0">
+              <a:buNone/>
+            </a:pPr>
+            <a:r>
+              <a:rPr lang="en-US" sz="1100" dirty="0">
+                <a:solidFill>
+                  <a:srgbClr val="C7D2E3"/>
+                </a:solidFill>
+                <a:latin typeface="Arial" pitchFamily="34" charset="0"/>
+                <a:ea typeface="Arial" pitchFamily="34" charset="-122"/>
+                <a:cs typeface="Arial" pitchFamily="34" charset="-120"/>
+              </a:rPr>
+              <a:t>M12 · Etapa 4 · Gestão e estratégia</a:t>
+            </a:r>
+            <a:endParaRPr lang="en-US" sz="1100" dirty="0"/>
+          </a:p>
+        </p:txBody>
+      </p:sp>
+      <p:sp>
+        <p:nvSpPr>
+          <p:cNvPr id="6" name="Text 4"/>
           <p:cNvSpPr/>
           <p:nvPr/>
         </p:nvSpPr>
@@ -8803,7 +9589,7 @@
       </p:sp>
       <p:pic>
         <p:nvPicPr>
-          <p:cNvPr id="5" name="Image 0" descr="/www/wwwroot/rexar/gdsolar/docs/curso/slides/assets/logo-gdsolar.png">    </p:cNvPr>
+          <p:cNvPr id="7" name="Image 0" descr="/www/wwwroot/rexar/gdsolar/docs/curso/slides/assets/logo-gdsolar.png">    </p:cNvPr>
           <p:cNvPicPr>
             <a:picLocks noChangeAspect="1"/>
           </p:cNvPicPr>
@@ -8827,7 +9613,7 @@
       </p:pic>
       <p:sp>
         <p:nvSpPr>
-          <p:cNvPr id="6" name="Text 3"/>
+          <p:cNvPr id="8" name="Text 5"/>
           <p:cNvSpPr/>
           <p:nvPr/>
         </p:nvSpPr>
@@ -8868,7 +9654,7 @@
       </p:sp>
       <p:sp>
         <p:nvSpPr>
-          <p:cNvPr id="7" name="Text 4"/>
+          <p:cNvPr id="9" name="Text 6"/>
           <p:cNvSpPr/>
           <p:nvPr/>
         </p:nvSpPr>
@@ -8909,7 +9695,7 @@
       </p:sp>
       <p:sp>
         <p:nvSpPr>
-          <p:cNvPr id="8" name="Text 5"/>
+          <p:cNvPr id="10" name="Text 7"/>
           <p:cNvSpPr/>
           <p:nvPr/>
         </p:nvSpPr>
@@ -9046,7 +9832,7 @@
         </p:blipFill>
         <p:spPr>
           <a:xfrm>
-            <a:off x="411480" y="6547104"/>
+            <a:off x="548640" y="6547104"/>
             <a:ext cx="274320" cy="274320"/>
           </a:xfrm>
           <a:prstGeom prst="rect">
@@ -9062,7 +9848,7 @@
         </p:nvSpPr>
         <p:spPr>
           <a:xfrm>
-            <a:off x="749808" y="6528816"/>
+            <a:off x="886968" y="6528816"/>
             <a:ext cx="6400800" cy="310896"/>
           </a:xfrm>
           <a:prstGeom prst="rect">
@@ -9102,7 +9888,7 @@
         <p:spPr>
           <a:xfrm>
             <a:off x="7132320" y="6528816"/>
-            <a:ext cx="4663440" cy="310896"/>
+            <a:ext cx="4023360" cy="310896"/>
           </a:xfrm>
           <a:prstGeom prst="rect">
             <a:avLst/>
@@ -9140,7 +9926,7 @@
         </p:nvSpPr>
         <p:spPr>
           <a:xfrm>
-            <a:off x="411480" y="384048"/>
+            <a:off x="548640" y="384048"/>
             <a:ext cx="82296" cy="658368"/>
           </a:xfrm>
           <a:prstGeom prst="rect">
@@ -9160,7 +9946,7 @@
         </p:nvSpPr>
         <p:spPr>
           <a:xfrm>
-            <a:off x="640080" y="292608"/>
+            <a:off x="777240" y="292608"/>
             <a:ext cx="10972800" cy="274320"/>
           </a:xfrm>
           <a:prstGeom prst="rect">
@@ -9199,8 +9985,8 @@
         </p:nvSpPr>
         <p:spPr>
           <a:xfrm>
-            <a:off x="640080" y="530352"/>
-            <a:ext cx="11155680" cy="566928"/>
+            <a:off x="777240" y="530352"/>
+            <a:ext cx="10881360" cy="566928"/>
           </a:xfrm>
           <a:prstGeom prst="rect">
             <a:avLst/>
@@ -9239,8 +10025,8 @@
           <p:nvPr/>
         </p:nvGraphicFramePr>
         <p:xfrm>
-          <a:off x="411480" y="1325880"/>
-          <a:ext cx="5852160" cy="4937760"/>
+          <a:off x="548640" y="1325880"/>
+          <a:ext cx="5669280" cy="4937760"/>
         </p:xfrm>
         <a:graphic xmlns:a="http://schemas.openxmlformats.org/drawingml/2006/main">
           <a:graphicData uri="http://schemas.openxmlformats.org/drawingml/2006/chart">
@@ -9263,16 +10049,16 @@
           </p:nvPr>
         </p:nvGraphicFramePr>
         <p:xfrm>
-          <a:off x="6492240" y="1600200"/>
-          <a:ext cx="5303520" cy="914400"/>
+          <a:off x="6446520" y="1600200"/>
+          <a:ext cx="5193792" cy="914400"/>
         </p:xfrm>
         <a:graphic>
           <a:graphicData uri="http://schemas.openxmlformats.org/drawingml/2006/table">
             <a:tbl>
               <a:tblPr/>
               <a:tblGrid>
-                <a:gridCol w="2651760"/>
-                <a:gridCol w="2651760"/>
+                <a:gridCol w="2596896"/>
+                <a:gridCol w="2596896"/>
               </a:tblGrid>
               <a:tr h="0">
                 <a:tc>
@@ -10106,6 +10892,54 @@
           </a:graphicData>
         </a:graphic>
       </p:graphicFrame>
+      <p:sp>
+        <p:nvSpPr>
+          <p:cNvPr id="25" name="Slide Number Placeholder 0"/>
+          <p:cNvSpPr>
+            <a:spLocks noGrp="1"/>
+          </p:cNvSpPr>
+          <p:nvPr>
+            <p:ph type="sldNum" sz="quarter" idx="4294967295"/>
+          </p:nvPr>
+        </p:nvSpPr>
+        <p:spPr>
+          <a:xfrm>
+            <a:off x="11292840" y="6556248"/>
+            <a:ext cx="548640" cy="256032"/>
+          </a:xfrm>
+          <a:prstGeom prst="rect">
+            <a:avLst/>
+          </a:prstGeom>
+          <a:extLst>
+            <a:ext uri="{C572A759-6A51-4108-AA02-DFA0A04FC94B}">
+              <ma14:wrappingTextBoxFlag xmlns:ma14="http://schemas.microsoft.com/office/mac/drawingml/2011/main" val="0"/>
+            </a:ext>
+          </a:extLst>
+        </p:spPr>
+        <p:txBody>
+          <a:bodyPr/>
+          <a:lstStyle>
+            <a:lvl1pPr>
+              <a:defRPr sz="900">
+                <a:solidFill>
+                  <a:srgbClr val="1B3A6B"/>
+                </a:solidFill>
+                <a:latin typeface="Arial"/>
+                <a:ea typeface="Arial"/>
+                <a:cs typeface="Arial"/>
+              </a:defRPr>
+            </a:lvl1pPr>
+          </a:lstStyle>
+          <a:p>
+            <a:pPr algn="r"/>
+            <a:fld id="{F7021451-1387-4CA6-816F-3879F97B5CBC}" type="slidenum">
+              <a:rPr b="1" lang="en-US"/>
+              <a:t>7</a:t>
+            </a:fld>
+            <a:endParaRPr lang="en-US"/>
+          </a:p>
+        </p:txBody>
+      </p:sp>
     </p:spTree>
   </p:cSld>
   <p:clrMapOvr>
@@ -10179,7 +11013,7 @@
         </p:blipFill>
         <p:spPr>
           <a:xfrm>
-            <a:off x="411480" y="6547104"/>
+            <a:off x="548640" y="6547104"/>
             <a:ext cx="274320" cy="274320"/>
           </a:xfrm>
           <a:prstGeom prst="rect">
@@ -10195,7 +11029,7 @@
         </p:nvSpPr>
         <p:spPr>
           <a:xfrm>
-            <a:off x="749808" y="6528816"/>
+            <a:off x="886968" y="6528816"/>
             <a:ext cx="6400800" cy="310896"/>
           </a:xfrm>
           <a:prstGeom prst="rect">
@@ -10235,7 +11069,7 @@
         <p:spPr>
           <a:xfrm>
             <a:off x="7132320" y="6528816"/>
-            <a:ext cx="4663440" cy="310896"/>
+            <a:ext cx="4023360" cy="310896"/>
           </a:xfrm>
           <a:prstGeom prst="rect">
             <a:avLst/>
@@ -10273,7 +11107,7 @@
         </p:nvSpPr>
         <p:spPr>
           <a:xfrm>
-            <a:off x="411480" y="384048"/>
+            <a:off x="548640" y="384048"/>
             <a:ext cx="82296" cy="658368"/>
           </a:xfrm>
           <a:prstGeom prst="rect">
@@ -10293,7 +11127,7 @@
         </p:nvSpPr>
         <p:spPr>
           <a:xfrm>
-            <a:off x="640080" y="292608"/>
+            <a:off x="777240" y="292608"/>
             <a:ext cx="10972800" cy="274320"/>
           </a:xfrm>
           <a:prstGeom prst="rect">
@@ -10332,8 +11166,8 @@
         </p:nvSpPr>
         <p:spPr>
           <a:xfrm>
-            <a:off x="640080" y="530352"/>
-            <a:ext cx="11155680" cy="566928"/>
+            <a:off x="777240" y="530352"/>
+            <a:ext cx="10881360" cy="566928"/>
           </a:xfrm>
           <a:prstGeom prst="rect">
             <a:avLst/>
@@ -10373,12 +11207,12 @@
         </p:nvSpPr>
         <p:spPr>
           <a:xfrm>
-            <a:off x="411480" y="1325880"/>
-            <a:ext cx="3642360" cy="4892040"/>
+            <a:off x="548640" y="1325880"/>
+            <a:ext cx="3544824" cy="4892040"/>
           </a:xfrm>
           <a:prstGeom prst="roundRect">
             <a:avLst>
-              <a:gd name="adj" fmla="val 2008"/>
+              <a:gd name="adj" fmla="val 2064"/>
             </a:avLst>
           </a:prstGeom>
           <a:solidFill>
@@ -10407,7 +11241,7 @@
         </p:nvSpPr>
         <p:spPr>
           <a:xfrm>
-            <a:off x="594360" y="1508760"/>
+            <a:off x="731520" y="1508760"/>
             <a:ext cx="457200" cy="457200"/>
           </a:xfrm>
           <a:prstGeom prst="ellipse">
@@ -10427,7 +11261,7 @@
         </p:nvSpPr>
         <p:spPr>
           <a:xfrm>
-            <a:off x="594360" y="1508760"/>
+            <a:off x="731520" y="1508760"/>
             <a:ext cx="457200" cy="457200"/>
           </a:xfrm>
           <a:prstGeom prst="rect">
@@ -10466,8 +11300,8 @@
         </p:nvSpPr>
         <p:spPr>
           <a:xfrm>
-            <a:off x="1188720" y="1435608"/>
-            <a:ext cx="2727960" cy="4672584"/>
+            <a:off x="1325880" y="1435608"/>
+            <a:ext cx="2630424" cy="4672584"/>
           </a:xfrm>
           <a:prstGeom prst="rect">
             <a:avLst/>
@@ -10507,12 +11341,12 @@
         </p:nvSpPr>
         <p:spPr>
           <a:xfrm>
-            <a:off x="4282440" y="1325880"/>
-            <a:ext cx="3642360" cy="4892040"/>
+            <a:off x="4322064" y="1325880"/>
+            <a:ext cx="3544824" cy="4892040"/>
           </a:xfrm>
           <a:prstGeom prst="roundRect">
             <a:avLst>
-              <a:gd name="adj" fmla="val 2008"/>
+              <a:gd name="adj" fmla="val 2064"/>
             </a:avLst>
           </a:prstGeom>
           <a:solidFill>
@@ -10541,7 +11375,7 @@
         </p:nvSpPr>
         <p:spPr>
           <a:xfrm>
-            <a:off x="4465320" y="1508760"/>
+            <a:off x="4504944" y="1508760"/>
             <a:ext cx="457200" cy="457200"/>
           </a:xfrm>
           <a:prstGeom prst="ellipse">
@@ -10561,7 +11395,7 @@
         </p:nvSpPr>
         <p:spPr>
           <a:xfrm>
-            <a:off x="4465320" y="1508760"/>
+            <a:off x="4504944" y="1508760"/>
             <a:ext cx="457200" cy="457200"/>
           </a:xfrm>
           <a:prstGeom prst="rect">
@@ -10600,8 +11434,8 @@
         </p:nvSpPr>
         <p:spPr>
           <a:xfrm>
-            <a:off x="5059680" y="1435608"/>
-            <a:ext cx="2727960" cy="4672584"/>
+            <a:off x="5099304" y="1435608"/>
+            <a:ext cx="2630424" cy="4672584"/>
           </a:xfrm>
           <a:prstGeom prst="rect">
             <a:avLst/>
@@ -10641,12 +11475,12 @@
         </p:nvSpPr>
         <p:spPr>
           <a:xfrm>
-            <a:off x="8153400" y="1325880"/>
-            <a:ext cx="3642360" cy="4892040"/>
+            <a:off x="8095488" y="1325880"/>
+            <a:ext cx="3544824" cy="4892040"/>
           </a:xfrm>
           <a:prstGeom prst="roundRect">
             <a:avLst>
-              <a:gd name="adj" fmla="val 2008"/>
+              <a:gd name="adj" fmla="val 2064"/>
             </a:avLst>
           </a:prstGeom>
           <a:solidFill>
@@ -10675,7 +11509,7 @@
         </p:nvSpPr>
         <p:spPr>
           <a:xfrm>
-            <a:off x="8336280" y="1508760"/>
+            <a:off x="8278368" y="1508760"/>
             <a:ext cx="457200" cy="457200"/>
           </a:xfrm>
           <a:prstGeom prst="ellipse">
@@ -10695,7 +11529,7 @@
         </p:nvSpPr>
         <p:spPr>
           <a:xfrm>
-            <a:off x="8336280" y="1508760"/>
+            <a:off x="8278368" y="1508760"/>
             <a:ext cx="457200" cy="457200"/>
           </a:xfrm>
           <a:prstGeom prst="rect">
@@ -10734,8 +11568,8 @@
         </p:nvSpPr>
         <p:spPr>
           <a:xfrm>
-            <a:off x="8930640" y="1435608"/>
-            <a:ext cx="2727960" cy="4672584"/>
+            <a:off x="8872728" y="1435608"/>
+            <a:ext cx="2630424" cy="4672584"/>
           </a:xfrm>
           <a:prstGeom prst="rect">
             <a:avLst/>
@@ -10764,6 +11598,54 @@
               <a:t>abaixo de 70%: devolutiva e uma nova entrega</a:t>
             </a:r>
             <a:endParaRPr lang="en-US" sz="1800" dirty="0"/>
+          </a:p>
+        </p:txBody>
+      </p:sp>
+      <p:sp>
+        <p:nvSpPr>
+          <p:cNvPr id="25" name="Slide Number Placeholder 0"/>
+          <p:cNvSpPr>
+            <a:spLocks noGrp="1"/>
+          </p:cNvSpPr>
+          <p:nvPr>
+            <p:ph type="sldNum" sz="quarter" idx="4294967295"/>
+          </p:nvPr>
+        </p:nvSpPr>
+        <p:spPr>
+          <a:xfrm>
+            <a:off x="11292840" y="6556248"/>
+            <a:ext cx="548640" cy="256032"/>
+          </a:xfrm>
+          <a:prstGeom prst="rect">
+            <a:avLst/>
+          </a:prstGeom>
+          <a:extLst>
+            <a:ext uri="{C572A759-6A51-4108-AA02-DFA0A04FC94B}">
+              <ma14:wrappingTextBoxFlag xmlns:ma14="http://schemas.microsoft.com/office/mac/drawingml/2011/main" val="0"/>
+            </a:ext>
+          </a:extLst>
+        </p:spPr>
+        <p:txBody>
+          <a:bodyPr/>
+          <a:lstStyle>
+            <a:lvl1pPr>
+              <a:defRPr sz="900">
+                <a:solidFill>
+                  <a:srgbClr val="1B3A6B"/>
+                </a:solidFill>
+                <a:latin typeface="Arial"/>
+                <a:ea typeface="Arial"/>
+                <a:cs typeface="Arial"/>
+              </a:defRPr>
+            </a:lvl1pPr>
+          </a:lstStyle>
+          <a:p>
+            <a:pPr algn="r"/>
+            <a:fld id="{F7021451-1387-4CA6-816F-3879F97B5CBC}" type="slidenum">
+              <a:rPr b="1" lang="en-US"/>
+              <a:t>8</a:t>
+            </a:fld>
+            <a:endParaRPr lang="en-US"/>
           </a:p>
         </p:txBody>
       </p:sp>
@@ -10827,6 +11709,45 @@
         </p:nvSpPr>
         <p:spPr>
           <a:xfrm>
+            <a:off x="457200" y="548640"/>
+            <a:ext cx="3474720" cy="1737360"/>
+          </a:xfrm>
+          <a:prstGeom prst="rect">
+            <a:avLst/>
+          </a:prstGeom>
+          <a:noFill/>
+          <a:ln/>
+        </p:spPr>
+        <p:txBody>
+          <a:bodyPr wrap="square" rtlCol="0" anchor="ctr"/>
+          <a:lstStyle/>
+          <a:p>
+            <a:pPr indent="0" marL="0">
+              <a:buNone/>
+            </a:pPr>
+            <a:r>
+              <a:rPr lang="en-US" sz="11000" b="1" dirty="0">
+                <a:solidFill>
+                  <a:srgbClr val="11396F"/>
+                </a:solidFill>
+                <a:latin typeface="Arial" pitchFamily="34" charset="0"/>
+                <a:ea typeface="Arial" pitchFamily="34" charset="-122"/>
+                <a:cs typeface="Arial" pitchFamily="34" charset="-120"/>
+              </a:rPr>
+              <a:t>03</a:t>
+            </a:r>
+            <a:endParaRPr lang="en-US" sz="11000" dirty="0"/>
+          </a:p>
+        </p:txBody>
+      </p:sp>
+      <p:sp>
+        <p:nvSpPr>
+          <p:cNvPr id="4" name="Text 2"/>
+          <p:cNvSpPr/>
+          <p:nvPr/>
+        </p:nvSpPr>
+        <p:spPr>
+          <a:xfrm>
             <a:off x="548640" y="2194560"/>
             <a:ext cx="3291840" cy="548640"/>
           </a:xfrm>
@@ -10860,7 +11781,46 @@
       </p:sp>
       <p:sp>
         <p:nvSpPr>
-          <p:cNvPr id="4" name="Text 2"/>
+          <p:cNvPr id="5" name="Text 3"/>
+          <p:cNvSpPr/>
+          <p:nvPr/>
+        </p:nvSpPr>
+        <p:spPr>
+          <a:xfrm>
+            <a:off x="548640" y="3200400"/>
+            <a:ext cx="3383280" cy="457200"/>
+          </a:xfrm>
+          <a:prstGeom prst="rect">
+            <a:avLst/>
+          </a:prstGeom>
+          <a:noFill/>
+          <a:ln/>
+        </p:spPr>
+        <p:txBody>
+          <a:bodyPr wrap="square" rtlCol="0" anchor="ctr"/>
+          <a:lstStyle/>
+          <a:p>
+            <a:pPr indent="0" marL="0">
+              <a:buNone/>
+            </a:pPr>
+            <a:r>
+              <a:rPr lang="en-US" sz="1100" dirty="0">
+                <a:solidFill>
+                  <a:srgbClr val="C7D2E3"/>
+                </a:solidFill>
+                <a:latin typeface="Arial" pitchFamily="34" charset="0"/>
+                <a:ea typeface="Arial" pitchFamily="34" charset="-122"/>
+                <a:cs typeface="Arial" pitchFamily="34" charset="-120"/>
+              </a:rPr>
+              <a:t>M12 · Etapa 4 · Gestão e estratégia</a:t>
+            </a:r>
+            <a:endParaRPr lang="en-US" sz="1100" dirty="0"/>
+          </a:p>
+        </p:txBody>
+      </p:sp>
+      <p:sp>
+        <p:nvSpPr>
+          <p:cNvPr id="6" name="Text 4"/>
           <p:cNvSpPr/>
           <p:nvPr/>
         </p:nvSpPr>
@@ -10899,7 +11859,7 @@
       </p:sp>
       <p:pic>
         <p:nvPicPr>
-          <p:cNvPr id="5" name="Image 0" descr="/www/wwwroot/rexar/gdsolar/docs/curso/slides/assets/logo-gdsolar.png">    </p:cNvPr>
+          <p:cNvPr id="7" name="Image 0" descr="/www/wwwroot/rexar/gdsolar/docs/curso/slides/assets/logo-gdsolar.png">    </p:cNvPr>
           <p:cNvPicPr>
             <a:picLocks noChangeAspect="1"/>
           </p:cNvPicPr>
@@ -10923,7 +11883,7 @@
       </p:pic>
       <p:sp>
         <p:nvSpPr>
-          <p:cNvPr id="6" name="Text 3"/>
+          <p:cNvPr id="8" name="Text 5"/>
           <p:cNvSpPr/>
           <p:nvPr/>
         </p:nvSpPr>
@@ -10964,7 +11924,7 @@
       </p:sp>
       <p:sp>
         <p:nvSpPr>
-          <p:cNvPr id="7" name="Text 4"/>
+          <p:cNvPr id="9" name="Text 6"/>
           <p:cNvSpPr/>
           <p:nvPr/>
         </p:nvSpPr>
@@ -11005,7 +11965,7 @@
       </p:sp>
       <p:sp>
         <p:nvSpPr>
-          <p:cNvPr id="8" name="Text 5"/>
+          <p:cNvPr id="10" name="Text 7"/>
           <p:cNvSpPr/>
           <p:nvPr/>
         </p:nvSpPr>

--- a/docs/curso/slides/m12-projeto-final.pptx
+++ b/docs/curso/slides/m12-projeto-final.pptx
@@ -875,7 +875,7 @@
           <a:p>
             <a:r>
               <a:rPr lang="en-US" dirty="0"/>
-              <a:t>O que faz este projeto ser nota máxima? Os números batem entre o laboratório e os documentos. O comentário analisa, em vez de só descrever. Os riscos são honestos, incluindo os que preocupam. A linguagem é a correta — participação, gestão, economia calculada. E tudo é aplicável: este plano poderia ser apresentado amanhã a um investidor.</a:t>
+              <a:t>O que faz um projeto nota máxima: números que batem entre o laboratório e os documentos, análise em vez de descrição, riscos honestos e linguagem correta.</a:t>
             </a:r>
             <a:endParaRPr lang="en-US" dirty="0"/>
           </a:p>
@@ -963,8 +963,8 @@
           <a:p>
             <a:r>
               <a:rPr lang="en-US" dirty="0"/>
-              <a:t>Esta é a Solaris no laboratório, já com a marca dela. Duas usinas, com ocupação de noventa e quatro e noventa e seis por cento. Vinte e quatro clientes, entre empresas e residências; abra qualquer um e está tudo lá: unidade consumidora, proposta, contrato, vínculo e acesso ao portal. Três meses de faturas, todas aprovadas, com observações nas que tiveram pendência. Três meses de cobranças, com um ajuste justificado e uma vencida tratada com reemissão. E os alertas, sem nenhum crítico.
-Agora, os documentos. O plano em uma página, com os nove blocos. A conta do negócio, com os cenários de 2026 a 2029: repare que a Solaris mostra o cenário pessimista e o que faria se ele acontecesse. O relatório executivo do trimestre, com os doze indicadores e um comentário que explica o que aconteceu — por exemplo, a ocupação da usina dois caiu no mês dois por causa de duas saídas, e foi recomposta no mês três com clientes da fila. O relatório do produtor, de uma página. Os relatórios de economia. E o SOP, a régua de cobrança e a matriz de riscos, curtos e aplicáveis.</a:t>
+              <a:t>No laboratório: duas usinas bem ocupadas, vinte e quatro clientes, três meses fechados e nenhum alerta crítico.
+Nos documentos: plano, conta com cenários, relatório do trimestre, relatórios de produtor e de economia, procedimento padrão, régua e riscos.</a:t>
             </a:r>
             <a:endParaRPr lang="en-US" dirty="0"/>
           </a:p>
@@ -1228,7 +1228,7 @@
           <a:p>
             <a:r>
               <a:rPr lang="en-US" dirty="0"/>
-              <a:t>Se você vai tirar a empresa do papel, um plano para os primeiros noventa dias. Nos primeiros trinta: valide a sua conta com os números reais da sua distribuidora, contrate o advogado e o contador e converse com pelo menos cinco produtores. Do dia trinta e um ao sessenta: feche a primeira usina, com due diligence e contrato, monte a estrutura jurídica e configure a plataforma com a sua marca. Do sessenta e um ao noventa: faça a pré-venda, com data honesta, conquiste os primeiros trinta clientes, envie o rateio e rode o primeiro ciclo. E, se você já tem uma empresa solar, comece pela sua base de orçamentos perdidos.</a:t>
+              <a:t>Para tirar a empresa do papel, siga o plano dos noventa dias da tela: validar a conta, fechar a primeira usina e conquistar os primeiros clientes.</a:t>
             </a:r>
             <a:endParaRPr lang="en-US" dirty="0"/>
           </a:p>
@@ -1316,7 +1316,7 @@
           <a:p>
             <a:r>
               <a:rPr lang="en-US" dirty="0"/>
-              <a:t>Você não termina o curso sozinho. Continue na comunidade de ex-alunos, onde empreendedores de todo o país trocam experiências. Acompanhe as atualizações regulatórias semestrais, incluídas no seu acesso, especialmente as regras do Fio B a partir de 2029 e a reforma tributária. E, quando for operar de verdade, conte com a plataforma que você usou no curso, com condição especial para alunos, e com a implantação assistida, se quiser acompanhamento nos primeiros meses.</a:t>
+              <a:t>Continue na comunidade e acompanhe as atualizações regulatórias.</a:t>
             </a:r>
             <a:endParaRPr lang="en-US" dirty="0"/>
           </a:p>
@@ -1580,7 +1580,7 @@
           <a:p>
             <a:r>
               <a:rPr lang="en-US" dirty="0"/>
-              <a:t>No laboratório, a sua empresa precisa ter: a identidade visual aplicada; duas usinas — a do módulo 4 e uma nova —, cada uma com produtor, proposta e três meses de geração; mais de vinte clientes, misturando empresas e residências, cada um com unidade consumidora, proposta, contrato, vínculo e convite; ocupação entre noventa e noventa e oito por cento em cada usina, sem nenhum cliente com vinte e cinco por cento ou mais; três meses de faturas revisadas e aprovadas, com as pendências resolvidas e justificadas; três meses de cobranças, emitidas e pagas, com pelo menos um ajuste e uma cobrança vencida tratada; e os alertas críticos zerados no fechamento de cada mês. O laboratório tem o checkpoint do módulo 9 para quem precisar de uma base.</a:t>
+              <a:t>No laboratório, a sua empresa precisa ter tudo o que está na lista da tela.</a:t>
             </a:r>
             <a:endParaRPr lang="en-US" dirty="0"/>
           </a:p>
@@ -1668,7 +1668,7 @@
           <a:p>
             <a:r>
               <a:rPr lang="en-US" dirty="0"/>
-              <a:t>Em documento, entregue: o plano de negócio em uma página; a conta do negócio, com os cenários de 2026 a 2028 e 2029; o relatório executivo do trimestre, com os doze indicadores nos três meses e um comentário; o relatório de um produtor e três relatórios de economia de clientes; o SOP, a régua de cobrança e a matriz de riscos. E, na turma com acompanhamento, um vídeo de até cinco minutos apresentando a sua empresa, como se fosse para um investidor.</a:t>
+              <a:t>Em documento, entregue os itens da tela.</a:t>
             </a:r>
             <a:endParaRPr lang="en-US" dirty="0"/>
           </a:p>
@@ -1756,7 +1756,7 @@
           <a:p>
             <a:r>
               <a:rPr lang="en-US" dirty="0"/>
-              <a:t>Organize em duas semanas. Na primeira, o laboratório: segunda usina, clientes novos e o terceiro mês de operação. Na segunda, os documentos: relatórios, plano, vídeo, e uma revisão final usando a rubrica, que é o assunto da próxima aula. Use a comunidade: é permitido — e incentivado — trocar ideias com os colegas, desde que cada um entregue a própria empresa.</a:t>
+              <a:t>Organize em duas semanas: primeiro o laboratório, depois os documentos e a revisão pela rubrica.</a:t>
             </a:r>
             <a:endParaRPr lang="en-US" dirty="0"/>
           </a:p>
@@ -1932,7 +1932,7 @@
           <a:p>
             <a:r>
               <a:rPr lang="en-US" dirty="0"/>
-              <a:t>São cinco critérios. O primeiro, com trinta por cento, é a operação no laboratório: tudo o que está no checklist existe e está correto — usinas, clientes, ocupação, faturas, cobranças, alertas. O segundo, com vinte por cento, é a conta do negócio: os números são coerentes, têm origem e consideram os cenários do Fio B. O terceiro, com vinte, são os indicadores e relatórios: os números batem com o laboratório e o comentário mostra análise, não só descrição. O quarto, com vinte, é a gestão: SOP, régua de cobrança, matriz de riscos e plano em uma página, aplicáveis à vida real. E o quinto, com dez, é a comunicação: clareza, a linguagem correta — participação, gestão, sem "venda de energia" — e a apresentação.</a:t>
+              <a:t>O maior peso é a operação no laboratório. Nos documentos, vale a coerência dos números, a análise e a linguagem correta.</a:t>
             </a:r>
             <a:endParaRPr lang="en-US" dirty="0"/>
           </a:p>
@@ -2020,7 +2020,7 @@
           <a:p>
             <a:r>
               <a:rPr lang="en-US" dirty="0"/>
-              <a:t>Com setenta por cento ou mais, você é aprovado e recebe o certificado. Com noventa ou mais, o certificado sai com distinção, e o seu projeto pode ser convidado para a vitrine da comunidade. Abaixo de setenta, você recebe uma devolutiva detalhada e tem direito a uma nova entrega. No autoestudo, a avaliação é feita por você mesmo, com a rubrica e um checklist automático, e o certificado de conclusão exige os quizzes e a autoavaliação.</a:t>
+              <a:t>Setenta por cento aprova; noventa, com distinção.</a:t>
             </a:r>
             <a:endParaRPr lang="en-US" dirty="0"/>
           </a:p>
@@ -3191,11 +3191,11 @@
         <p:spPr>
           <a:xfrm>
             <a:off x="548640" y="1325880"/>
-            <a:ext cx="3544824" cy="2331720"/>
+            <a:ext cx="3544824" cy="1874520"/>
           </a:xfrm>
           <a:prstGeom prst="roundRect">
             <a:avLst>
-              <a:gd name="adj" fmla="val 3137"/>
+              <a:gd name="adj" fmla="val 3902"/>
             </a:avLst>
           </a:prstGeom>
           <a:solidFill>
@@ -3284,7 +3284,7 @@
         <p:spPr>
           <a:xfrm>
             <a:off x="1325880" y="1435608"/>
-            <a:ext cx="2630424" cy="2112264"/>
+            <a:ext cx="2630424" cy="1655064"/>
           </a:xfrm>
           <a:prstGeom prst="rect">
             <a:avLst/>
@@ -3325,11 +3325,11 @@
         <p:spPr>
           <a:xfrm>
             <a:off x="4322064" y="1325880"/>
-            <a:ext cx="3544824" cy="2331720"/>
+            <a:ext cx="3544824" cy="1874520"/>
           </a:xfrm>
           <a:prstGeom prst="roundRect">
             <a:avLst>
-              <a:gd name="adj" fmla="val 3137"/>
+              <a:gd name="adj" fmla="val 3902"/>
             </a:avLst>
           </a:prstGeom>
           <a:solidFill>
@@ -3418,7 +3418,7 @@
         <p:spPr>
           <a:xfrm>
             <a:off x="5099304" y="1435608"/>
-            <a:ext cx="2630424" cy="2112264"/>
+            <a:ext cx="2630424" cy="1655064"/>
           </a:xfrm>
           <a:prstGeom prst="rect">
             <a:avLst/>
@@ -3459,11 +3459,11 @@
         <p:spPr>
           <a:xfrm>
             <a:off x="8095488" y="1325880"/>
-            <a:ext cx="3544824" cy="2331720"/>
+            <a:ext cx="3544824" cy="1874520"/>
           </a:xfrm>
           <a:prstGeom prst="roundRect">
             <a:avLst>
-              <a:gd name="adj" fmla="val 3137"/>
+              <a:gd name="adj" fmla="val 3902"/>
             </a:avLst>
           </a:prstGeom>
           <a:solidFill>
@@ -3552,7 +3552,7 @@
         <p:spPr>
           <a:xfrm>
             <a:off x="8872728" y="1435608"/>
-            <a:ext cx="2630424" cy="2112264"/>
+            <a:ext cx="2630424" cy="1655064"/>
           </a:xfrm>
           <a:prstGeom prst="rect">
             <a:avLst/>
@@ -3592,12 +3592,12 @@
         </p:nvSpPr>
         <p:spPr>
           <a:xfrm>
-            <a:off x="548640" y="3886200"/>
-            <a:ext cx="3544824" cy="2331720"/>
+            <a:off x="548640" y="3429000"/>
+            <a:ext cx="3544824" cy="1874520"/>
           </a:xfrm>
           <a:prstGeom prst="roundRect">
             <a:avLst>
-              <a:gd name="adj" fmla="val 3137"/>
+              <a:gd name="adj" fmla="val 3902"/>
             </a:avLst>
           </a:prstGeom>
           <a:solidFill>
@@ -3626,7 +3626,7 @@
         </p:nvSpPr>
         <p:spPr>
           <a:xfrm>
-            <a:off x="731520" y="4069080"/>
+            <a:off x="731520" y="3611880"/>
             <a:ext cx="457200" cy="457200"/>
           </a:xfrm>
           <a:prstGeom prst="ellipse">
@@ -3646,7 +3646,7 @@
         </p:nvSpPr>
         <p:spPr>
           <a:xfrm>
-            <a:off x="731520" y="4069080"/>
+            <a:off x="731520" y="3611880"/>
             <a:ext cx="457200" cy="457200"/>
           </a:xfrm>
           <a:prstGeom prst="rect">
@@ -3685,8 +3685,8 @@
         </p:nvSpPr>
         <p:spPr>
           <a:xfrm>
-            <a:off x="1325880" y="3995928"/>
-            <a:ext cx="2630424" cy="2112264"/>
+            <a:off x="1325880" y="3538728"/>
+            <a:ext cx="2630424" cy="1655064"/>
           </a:xfrm>
           <a:prstGeom prst="rect">
             <a:avLst/>
@@ -3726,12 +3726,12 @@
         </p:nvSpPr>
         <p:spPr>
           <a:xfrm>
-            <a:off x="4322064" y="3886200"/>
-            <a:ext cx="3544824" cy="2331720"/>
+            <a:off x="4322064" y="3429000"/>
+            <a:ext cx="3544824" cy="1874520"/>
           </a:xfrm>
           <a:prstGeom prst="roundRect">
             <a:avLst>
-              <a:gd name="adj" fmla="val 3137"/>
+              <a:gd name="adj" fmla="val 3902"/>
             </a:avLst>
           </a:prstGeom>
           <a:solidFill>
@@ -3760,7 +3760,7 @@
         </p:nvSpPr>
         <p:spPr>
           <a:xfrm>
-            <a:off x="4504944" y="4069080"/>
+            <a:off x="4504944" y="3611880"/>
             <a:ext cx="457200" cy="457200"/>
           </a:xfrm>
           <a:prstGeom prst="ellipse">
@@ -3780,7 +3780,7 @@
         </p:nvSpPr>
         <p:spPr>
           <a:xfrm>
-            <a:off x="4504944" y="4069080"/>
+            <a:off x="4504944" y="3611880"/>
             <a:ext cx="457200" cy="457200"/>
           </a:xfrm>
           <a:prstGeom prst="rect">
@@ -3819,8 +3819,8 @@
         </p:nvSpPr>
         <p:spPr>
           <a:xfrm>
-            <a:off x="5099304" y="3995928"/>
-            <a:ext cx="2630424" cy="2112264"/>
+            <a:off x="5099304" y="3538728"/>
+            <a:ext cx="2630424" cy="1655064"/>
           </a:xfrm>
           <a:prstGeom prst="rect">
             <a:avLst/>
@@ -3849,6 +3849,92 @@
               <a:t>tudo aplicável à vida real</a:t>
             </a:r>
             <a:endParaRPr lang="en-US" sz="1800" dirty="0"/>
+          </a:p>
+        </p:txBody>
+      </p:sp>
+      <p:sp>
+        <p:nvSpPr>
+          <p:cNvPr id="29" name="Shape 26"/>
+          <p:cNvSpPr/>
+          <p:nvPr/>
+        </p:nvSpPr>
+        <p:spPr>
+          <a:xfrm>
+            <a:off x="548640" y="5413248"/>
+            <a:ext cx="11091672" cy="868680"/>
+          </a:xfrm>
+          <a:prstGeom prst="roundRect">
+            <a:avLst>
+              <a:gd name="adj" fmla="val 8421"/>
+            </a:avLst>
+          </a:prstGeom>
+          <a:solidFill>
+            <a:srgbClr val="EEF3FA"/>
+          </a:solidFill>
+          <a:ln w="6350">
+            <a:solidFill>
+              <a:srgbClr val="D8E0EC"/>
+            </a:solidFill>
+            <a:prstDash val="solid"/>
+          </a:ln>
+        </p:spPr>
+      </p:sp>
+      <p:sp>
+        <p:nvSpPr>
+          <p:cNvPr id="30" name="Shape 27"/>
+          <p:cNvSpPr/>
+          <p:nvPr/>
+        </p:nvSpPr>
+        <p:spPr>
+          <a:xfrm>
+            <a:off x="548640" y="5413248"/>
+            <a:ext cx="91440" cy="868680"/>
+          </a:xfrm>
+          <a:prstGeom prst="rect">
+            <a:avLst/>
+          </a:prstGeom>
+          <a:solidFill>
+            <a:srgbClr val="F7A23B"/>
+          </a:solidFill>
+          <a:ln/>
+        </p:spPr>
+      </p:sp>
+      <p:sp>
+        <p:nvSpPr>
+          <p:cNvPr id="31" name="Text 28"/>
+          <p:cNvSpPr/>
+          <p:nvPr/>
+        </p:nvSpPr>
+        <p:spPr>
+          <a:xfrm>
+            <a:off x="777240" y="5458968"/>
+            <a:ext cx="10744200" cy="777240"/>
+          </a:xfrm>
+          <a:prstGeom prst="rect">
+            <a:avLst/>
+          </a:prstGeom>
+          <a:noFill/>
+          <a:ln/>
+        </p:spPr>
+        <p:txBody>
+          <a:bodyPr wrap="square" rtlCol="0" anchor="ctr"/>
+          <a:lstStyle/>
+          <a:p>
+            <a:pPr indent="0" marL="0">
+              <a:buNone/>
+            </a:pPr>
+            <a:r>
+              <a:rPr lang="en-US" sz="1500" dirty="0">
+                <a:solidFill>
+                  <a:srgbClr val="1F2937"/>
+                </a:solidFill>
+                <a:latin typeface="Arial" pitchFamily="34" charset="0"/>
+                <a:ea typeface="Arial" pitchFamily="34" charset="-122"/>
+                <a:cs typeface="Arial" pitchFamily="34" charset="-120"/>
+              </a:rPr>
+              <a:t>O que faz um projeto nota máxima: números que batem entre o laboratório e os documentos, análise em vez de descrição, riscos honestos e linguagem correta.</a:t>
+            </a:r>
+            <a:endParaRPr lang="en-US" sz="1500" dirty="0"/>
           </a:p>
         </p:txBody>
       </p:sp>
@@ -4325,7 +4411,7 @@
                 <a:ea typeface="Arial" pitchFamily="34" charset="-122"/>
                 <a:cs typeface="Arial" pitchFamily="34" charset="-120"/>
               </a:rPr>
-              <a:t>2 usinas (94% e 96%) · 24 clientes · 3 meses: faturas aprovadas, cobranças pagas · zero críticos</a:t>
+              <a:t>No laboratório: duas usinas bem ocupadas, vinte e quatro clientes, três meses fechados e nenhum alerta crítico.</a:t>
             </a:r>
             <a:endParaRPr lang="en-US" sz="1500" dirty="0"/>
           </a:p>
@@ -4376,7 +4462,7 @@
                 <a:ea typeface="Arial" pitchFamily="34" charset="-122"/>
                 <a:cs typeface="Arial" pitchFamily="34" charset="-120"/>
               </a:rPr>
-              <a:t>Plano · conta com cenários · relatório do trimestre · produtor · economia · SOP · régua · riscos</a:t>
+              <a:t>Nos documentos: plano, conta com cenários, relatório do trimestre, relatórios de produtor e de economia, procedimento padrão, régua e riscos.</a:t>
             </a:r>
             <a:endParaRPr lang="en-US" sz="1500" dirty="0"/>
           </a:p>
@@ -5443,7 +5529,7 @@
         <p:spPr>
           <a:xfrm>
             <a:off x="548640" y="1325880"/>
-            <a:ext cx="11155680" cy="4937760"/>
+            <a:ext cx="11155680" cy="3977640"/>
           </a:xfrm>
           <a:prstGeom prst="rect">
             <a:avLst/>
@@ -5518,6 +5604,92 @@
               <a:t>Dias 61–90: pré-venda com data honesta · primeiros 30 clientes · rateio · primeiro ciclo</a:t>
             </a:r>
             <a:endParaRPr lang="en-US" sz="1400" dirty="0"/>
+          </a:p>
+        </p:txBody>
+      </p:sp>
+      <p:sp>
+        <p:nvSpPr>
+          <p:cNvPr id="10" name="Shape 7"/>
+          <p:cNvSpPr/>
+          <p:nvPr/>
+        </p:nvSpPr>
+        <p:spPr>
+          <a:xfrm>
+            <a:off x="548640" y="5413248"/>
+            <a:ext cx="11091672" cy="868680"/>
+          </a:xfrm>
+          <a:prstGeom prst="roundRect">
+            <a:avLst>
+              <a:gd name="adj" fmla="val 8421"/>
+            </a:avLst>
+          </a:prstGeom>
+          <a:solidFill>
+            <a:srgbClr val="EEF3FA"/>
+          </a:solidFill>
+          <a:ln w="6350">
+            <a:solidFill>
+              <a:srgbClr val="D8E0EC"/>
+            </a:solidFill>
+            <a:prstDash val="solid"/>
+          </a:ln>
+        </p:spPr>
+      </p:sp>
+      <p:sp>
+        <p:nvSpPr>
+          <p:cNvPr id="11" name="Shape 8"/>
+          <p:cNvSpPr/>
+          <p:nvPr/>
+        </p:nvSpPr>
+        <p:spPr>
+          <a:xfrm>
+            <a:off x="548640" y="5413248"/>
+            <a:ext cx="91440" cy="868680"/>
+          </a:xfrm>
+          <a:prstGeom prst="rect">
+            <a:avLst/>
+          </a:prstGeom>
+          <a:solidFill>
+            <a:srgbClr val="F7A23B"/>
+          </a:solidFill>
+          <a:ln/>
+        </p:spPr>
+      </p:sp>
+      <p:sp>
+        <p:nvSpPr>
+          <p:cNvPr id="12" name="Text 9"/>
+          <p:cNvSpPr/>
+          <p:nvPr/>
+        </p:nvSpPr>
+        <p:spPr>
+          <a:xfrm>
+            <a:off x="777240" y="5458968"/>
+            <a:ext cx="10744200" cy="777240"/>
+          </a:xfrm>
+          <a:prstGeom prst="rect">
+            <a:avLst/>
+          </a:prstGeom>
+          <a:noFill/>
+          <a:ln/>
+        </p:spPr>
+        <p:txBody>
+          <a:bodyPr wrap="square" rtlCol="0" anchor="ctr"/>
+          <a:lstStyle/>
+          <a:p>
+            <a:pPr indent="0" marL="0">
+              <a:buNone/>
+            </a:pPr>
+            <a:r>
+              <a:rPr lang="en-US" sz="1500" dirty="0">
+                <a:solidFill>
+                  <a:srgbClr val="1F2937"/>
+                </a:solidFill>
+                <a:latin typeface="Arial" pitchFamily="34" charset="0"/>
+                <a:ea typeface="Arial" pitchFamily="34" charset="-122"/>
+                <a:cs typeface="Arial" pitchFamily="34" charset="-120"/>
+              </a:rPr>
+              <a:t>Para tirar a empresa do papel, siga o plano dos noventa dias da tela: validar a conta, fechar a primeira usina e conquistar os primeiros clientes.</a:t>
+            </a:r>
+            <a:endParaRPr lang="en-US" sz="1500" dirty="0"/>
           </a:p>
         </p:txBody>
       </p:sp>
@@ -5837,11 +6009,11 @@
         <p:spPr>
           <a:xfrm>
             <a:off x="548640" y="1325880"/>
-            <a:ext cx="5431536" cy="2331720"/>
+            <a:ext cx="5431536" cy="1874520"/>
           </a:xfrm>
           <a:prstGeom prst="roundRect">
             <a:avLst>
-              <a:gd name="adj" fmla="val 3137"/>
+              <a:gd name="adj" fmla="val 3902"/>
             </a:avLst>
           </a:prstGeom>
           <a:solidFill>
@@ -5930,7 +6102,7 @@
         <p:spPr>
           <a:xfrm>
             <a:off x="1325880" y="1435608"/>
-            <a:ext cx="4517136" cy="2112264"/>
+            <a:ext cx="4517136" cy="1655064"/>
           </a:xfrm>
           <a:prstGeom prst="rect">
             <a:avLst/>
@@ -5971,11 +6143,11 @@
         <p:spPr>
           <a:xfrm>
             <a:off x="6208776" y="1325880"/>
-            <a:ext cx="5431536" cy="2331720"/>
+            <a:ext cx="5431536" cy="1874520"/>
           </a:xfrm>
           <a:prstGeom prst="roundRect">
             <a:avLst>
-              <a:gd name="adj" fmla="val 3137"/>
+              <a:gd name="adj" fmla="val 3902"/>
             </a:avLst>
           </a:prstGeom>
           <a:solidFill>
@@ -6064,7 +6236,7 @@
         <p:spPr>
           <a:xfrm>
             <a:off x="6986016" y="1435608"/>
-            <a:ext cx="4517136" cy="2112264"/>
+            <a:ext cx="4517136" cy="1655064"/>
           </a:xfrm>
           <a:prstGeom prst="rect">
             <a:avLst/>
@@ -6104,12 +6276,12 @@
         </p:nvSpPr>
         <p:spPr>
           <a:xfrm>
-            <a:off x="548640" y="3886200"/>
-            <a:ext cx="5431536" cy="2331720"/>
+            <a:off x="548640" y="3429000"/>
+            <a:ext cx="5431536" cy="1874520"/>
           </a:xfrm>
           <a:prstGeom prst="roundRect">
             <a:avLst>
-              <a:gd name="adj" fmla="val 3137"/>
+              <a:gd name="adj" fmla="val 3902"/>
             </a:avLst>
           </a:prstGeom>
           <a:solidFill>
@@ -6138,7 +6310,7 @@
         </p:nvSpPr>
         <p:spPr>
           <a:xfrm>
-            <a:off x="731520" y="4069080"/>
+            <a:off x="731520" y="3611880"/>
             <a:ext cx="457200" cy="457200"/>
           </a:xfrm>
           <a:prstGeom prst="ellipse">
@@ -6158,7 +6330,7 @@
         </p:nvSpPr>
         <p:spPr>
           <a:xfrm>
-            <a:off x="731520" y="4069080"/>
+            <a:off x="731520" y="3611880"/>
             <a:ext cx="457200" cy="457200"/>
           </a:xfrm>
           <a:prstGeom prst="rect">
@@ -6197,8 +6369,8 @@
         </p:nvSpPr>
         <p:spPr>
           <a:xfrm>
-            <a:off x="1325880" y="3995928"/>
-            <a:ext cx="4517136" cy="2112264"/>
+            <a:off x="1325880" y="3538728"/>
+            <a:ext cx="4517136" cy="1655064"/>
           </a:xfrm>
           <a:prstGeom prst="rect">
             <a:avLst/>
@@ -6238,12 +6410,12 @@
         </p:nvSpPr>
         <p:spPr>
           <a:xfrm>
-            <a:off x="6208776" y="3886200"/>
-            <a:ext cx="5431536" cy="2331720"/>
+            <a:off x="6208776" y="3429000"/>
+            <a:ext cx="5431536" cy="1874520"/>
           </a:xfrm>
           <a:prstGeom prst="roundRect">
             <a:avLst>
-              <a:gd name="adj" fmla="val 3137"/>
+              <a:gd name="adj" fmla="val 3902"/>
             </a:avLst>
           </a:prstGeom>
           <a:solidFill>
@@ -6272,7 +6444,7 @@
         </p:nvSpPr>
         <p:spPr>
           <a:xfrm>
-            <a:off x="6391656" y="4069080"/>
+            <a:off x="6391656" y="3611880"/>
             <a:ext cx="457200" cy="457200"/>
           </a:xfrm>
           <a:prstGeom prst="ellipse">
@@ -6292,7 +6464,7 @@
         </p:nvSpPr>
         <p:spPr>
           <a:xfrm>
-            <a:off x="6391656" y="4069080"/>
+            <a:off x="6391656" y="3611880"/>
             <a:ext cx="457200" cy="457200"/>
           </a:xfrm>
           <a:prstGeom prst="rect">
@@ -6331,8 +6503,8 @@
         </p:nvSpPr>
         <p:spPr>
           <a:xfrm>
-            <a:off x="6986016" y="3995928"/>
-            <a:ext cx="4517136" cy="2112264"/>
+            <a:off x="6986016" y="3538728"/>
+            <a:ext cx="4517136" cy="1655064"/>
           </a:xfrm>
           <a:prstGeom prst="rect">
             <a:avLst/>
@@ -6361,6 +6533,92 @@
               <a:t>implantação assistida</a:t>
             </a:r>
             <a:endParaRPr lang="en-US" sz="1800" dirty="0"/>
+          </a:p>
+        </p:txBody>
+      </p:sp>
+      <p:sp>
+        <p:nvSpPr>
+          <p:cNvPr id="25" name="Shape 22"/>
+          <p:cNvSpPr/>
+          <p:nvPr/>
+        </p:nvSpPr>
+        <p:spPr>
+          <a:xfrm>
+            <a:off x="548640" y="5413248"/>
+            <a:ext cx="11091672" cy="868680"/>
+          </a:xfrm>
+          <a:prstGeom prst="roundRect">
+            <a:avLst>
+              <a:gd name="adj" fmla="val 8421"/>
+            </a:avLst>
+          </a:prstGeom>
+          <a:solidFill>
+            <a:srgbClr val="EEF3FA"/>
+          </a:solidFill>
+          <a:ln w="6350">
+            <a:solidFill>
+              <a:srgbClr val="D8E0EC"/>
+            </a:solidFill>
+            <a:prstDash val="solid"/>
+          </a:ln>
+        </p:spPr>
+      </p:sp>
+      <p:sp>
+        <p:nvSpPr>
+          <p:cNvPr id="26" name="Shape 23"/>
+          <p:cNvSpPr/>
+          <p:nvPr/>
+        </p:nvSpPr>
+        <p:spPr>
+          <a:xfrm>
+            <a:off x="548640" y="5413248"/>
+            <a:ext cx="91440" cy="868680"/>
+          </a:xfrm>
+          <a:prstGeom prst="rect">
+            <a:avLst/>
+          </a:prstGeom>
+          <a:solidFill>
+            <a:srgbClr val="F7A23B"/>
+          </a:solidFill>
+          <a:ln/>
+        </p:spPr>
+      </p:sp>
+      <p:sp>
+        <p:nvSpPr>
+          <p:cNvPr id="27" name="Text 24"/>
+          <p:cNvSpPr/>
+          <p:nvPr/>
+        </p:nvSpPr>
+        <p:spPr>
+          <a:xfrm>
+            <a:off x="777240" y="5458968"/>
+            <a:ext cx="10744200" cy="777240"/>
+          </a:xfrm>
+          <a:prstGeom prst="rect">
+            <a:avLst/>
+          </a:prstGeom>
+          <a:noFill/>
+          <a:ln/>
+        </p:spPr>
+        <p:txBody>
+          <a:bodyPr wrap="square" rtlCol="0" anchor="ctr"/>
+          <a:lstStyle/>
+          <a:p>
+            <a:pPr indent="0" marL="0">
+              <a:buNone/>
+            </a:pPr>
+            <a:r>
+              <a:rPr lang="en-US" sz="1500" dirty="0">
+                <a:solidFill>
+                  <a:srgbClr val="1F2937"/>
+                </a:solidFill>
+                <a:latin typeface="Arial" pitchFamily="34" charset="0"/>
+                <a:ea typeface="Arial" pitchFamily="34" charset="-122"/>
+                <a:cs typeface="Arial" pitchFamily="34" charset="-120"/>
+              </a:rPr>
+              <a:t>Continue na comunidade e acompanhe as atualizações regulatórias.</a:t>
+            </a:r>
+            <a:endParaRPr lang="en-US" sz="1500" dirty="0"/>
           </a:p>
         </p:txBody>
       </p:sp>
@@ -7466,7 +7724,7 @@
         <p:spPr>
           <a:xfrm>
             <a:off x="548640" y="1325880"/>
-            <a:ext cx="5486400" cy="4937760"/>
+            <a:ext cx="5486400" cy="3977640"/>
           </a:xfrm>
           <a:prstGeom prst="rect">
             <a:avLst/>
@@ -7570,7 +7828,7 @@
         <p:spPr>
           <a:xfrm>
             <a:off x="6263640" y="1325880"/>
-            <a:ext cx="5486400" cy="4937760"/>
+            <a:ext cx="5486400" cy="3977640"/>
           </a:xfrm>
           <a:prstGeom prst="rect">
             <a:avLst/>
@@ -7642,6 +7900,92 @@
               <a:t>☐ Alertas críticos zerados no fechamento de cada mês</a:t>
             </a:r>
             <a:endParaRPr lang="en-US" sz="1800" dirty="0"/>
+          </a:p>
+        </p:txBody>
+      </p:sp>
+      <p:sp>
+        <p:nvSpPr>
+          <p:cNvPr id="11" name="Shape 8"/>
+          <p:cNvSpPr/>
+          <p:nvPr/>
+        </p:nvSpPr>
+        <p:spPr>
+          <a:xfrm>
+            <a:off x="548640" y="5413248"/>
+            <a:ext cx="11091672" cy="868680"/>
+          </a:xfrm>
+          <a:prstGeom prst="roundRect">
+            <a:avLst>
+              <a:gd name="adj" fmla="val 8421"/>
+            </a:avLst>
+          </a:prstGeom>
+          <a:solidFill>
+            <a:srgbClr val="EEF3FA"/>
+          </a:solidFill>
+          <a:ln w="6350">
+            <a:solidFill>
+              <a:srgbClr val="D8E0EC"/>
+            </a:solidFill>
+            <a:prstDash val="solid"/>
+          </a:ln>
+        </p:spPr>
+      </p:sp>
+      <p:sp>
+        <p:nvSpPr>
+          <p:cNvPr id="12" name="Shape 9"/>
+          <p:cNvSpPr/>
+          <p:nvPr/>
+        </p:nvSpPr>
+        <p:spPr>
+          <a:xfrm>
+            <a:off x="548640" y="5413248"/>
+            <a:ext cx="91440" cy="868680"/>
+          </a:xfrm>
+          <a:prstGeom prst="rect">
+            <a:avLst/>
+          </a:prstGeom>
+          <a:solidFill>
+            <a:srgbClr val="F7A23B"/>
+          </a:solidFill>
+          <a:ln/>
+        </p:spPr>
+      </p:sp>
+      <p:sp>
+        <p:nvSpPr>
+          <p:cNvPr id="13" name="Text 10"/>
+          <p:cNvSpPr/>
+          <p:nvPr/>
+        </p:nvSpPr>
+        <p:spPr>
+          <a:xfrm>
+            <a:off x="777240" y="5458968"/>
+            <a:ext cx="10744200" cy="777240"/>
+          </a:xfrm>
+          <a:prstGeom prst="rect">
+            <a:avLst/>
+          </a:prstGeom>
+          <a:noFill/>
+          <a:ln/>
+        </p:spPr>
+        <p:txBody>
+          <a:bodyPr wrap="square" rtlCol="0" anchor="ctr"/>
+          <a:lstStyle/>
+          <a:p>
+            <a:pPr indent="0" marL="0">
+              <a:buNone/>
+            </a:pPr>
+            <a:r>
+              <a:rPr lang="en-US" sz="1500" dirty="0">
+                <a:solidFill>
+                  <a:srgbClr val="1F2937"/>
+                </a:solidFill>
+                <a:latin typeface="Arial" pitchFamily="34" charset="0"/>
+                <a:ea typeface="Arial" pitchFamily="34" charset="-122"/>
+                <a:cs typeface="Arial" pitchFamily="34" charset="-120"/>
+              </a:rPr>
+              <a:t>No laboratório, a sua empresa precisa ter tudo o que está na lista da tela.</a:t>
+            </a:r>
+            <a:endParaRPr lang="en-US" sz="1500" dirty="0"/>
           </a:p>
         </p:txBody>
       </p:sp>
@@ -7961,11 +8305,11 @@
         <p:spPr>
           <a:xfrm>
             <a:off x="548640" y="1325880"/>
-            <a:ext cx="3544824" cy="2331720"/>
+            <a:ext cx="3544824" cy="1874520"/>
           </a:xfrm>
           <a:prstGeom prst="roundRect">
             <a:avLst>
-              <a:gd name="adj" fmla="val 3137"/>
+              <a:gd name="adj" fmla="val 3902"/>
             </a:avLst>
           </a:prstGeom>
           <a:solidFill>
@@ -8054,7 +8398,7 @@
         <p:spPr>
           <a:xfrm>
             <a:off x="1325880" y="1435608"/>
-            <a:ext cx="2630424" cy="2112264"/>
+            <a:ext cx="2630424" cy="1655064"/>
           </a:xfrm>
           <a:prstGeom prst="rect">
             <a:avLst/>
@@ -8095,11 +8439,11 @@
         <p:spPr>
           <a:xfrm>
             <a:off x="4322064" y="1325880"/>
-            <a:ext cx="3544824" cy="2331720"/>
+            <a:ext cx="3544824" cy="1874520"/>
           </a:xfrm>
           <a:prstGeom prst="roundRect">
             <a:avLst>
-              <a:gd name="adj" fmla="val 3137"/>
+              <a:gd name="adj" fmla="val 3902"/>
             </a:avLst>
           </a:prstGeom>
           <a:solidFill>
@@ -8188,7 +8532,7 @@
         <p:spPr>
           <a:xfrm>
             <a:off x="5099304" y="1435608"/>
-            <a:ext cx="2630424" cy="2112264"/>
+            <a:ext cx="2630424" cy="1655064"/>
           </a:xfrm>
           <a:prstGeom prst="rect">
             <a:avLst/>
@@ -8229,11 +8573,11 @@
         <p:spPr>
           <a:xfrm>
             <a:off x="8095488" y="1325880"/>
-            <a:ext cx="3544824" cy="2331720"/>
+            <a:ext cx="3544824" cy="1874520"/>
           </a:xfrm>
           <a:prstGeom prst="roundRect">
             <a:avLst>
-              <a:gd name="adj" fmla="val 3137"/>
+              <a:gd name="adj" fmla="val 3902"/>
             </a:avLst>
           </a:prstGeom>
           <a:solidFill>
@@ -8322,7 +8666,7 @@
         <p:spPr>
           <a:xfrm>
             <a:off x="8872728" y="1435608"/>
-            <a:ext cx="2630424" cy="2112264"/>
+            <a:ext cx="2630424" cy="1655064"/>
           </a:xfrm>
           <a:prstGeom prst="rect">
             <a:avLst/>
@@ -8362,12 +8706,12 @@
         </p:nvSpPr>
         <p:spPr>
           <a:xfrm>
-            <a:off x="548640" y="3886200"/>
-            <a:ext cx="3544824" cy="2331720"/>
+            <a:off x="548640" y="3429000"/>
+            <a:ext cx="3544824" cy="1874520"/>
           </a:xfrm>
           <a:prstGeom prst="roundRect">
             <a:avLst>
-              <a:gd name="adj" fmla="val 3137"/>
+              <a:gd name="adj" fmla="val 3902"/>
             </a:avLst>
           </a:prstGeom>
           <a:solidFill>
@@ -8396,7 +8740,7 @@
         </p:nvSpPr>
         <p:spPr>
           <a:xfrm>
-            <a:off x="731520" y="4069080"/>
+            <a:off x="731520" y="3611880"/>
             <a:ext cx="457200" cy="457200"/>
           </a:xfrm>
           <a:prstGeom prst="ellipse">
@@ -8416,7 +8760,7 @@
         </p:nvSpPr>
         <p:spPr>
           <a:xfrm>
-            <a:off x="731520" y="4069080"/>
+            <a:off x="731520" y="3611880"/>
             <a:ext cx="457200" cy="457200"/>
           </a:xfrm>
           <a:prstGeom prst="rect">
@@ -8455,8 +8799,8 @@
         </p:nvSpPr>
         <p:spPr>
           <a:xfrm>
-            <a:off x="1325880" y="3995928"/>
-            <a:ext cx="2630424" cy="2112264"/>
+            <a:off x="1325880" y="3538728"/>
+            <a:ext cx="2630424" cy="1655064"/>
           </a:xfrm>
           <a:prstGeom prst="rect">
             <a:avLst/>
@@ -8496,12 +8840,12 @@
         </p:nvSpPr>
         <p:spPr>
           <a:xfrm>
-            <a:off x="4322064" y="3886200"/>
-            <a:ext cx="3544824" cy="2331720"/>
+            <a:off x="4322064" y="3429000"/>
+            <a:ext cx="3544824" cy="1874520"/>
           </a:xfrm>
           <a:prstGeom prst="roundRect">
             <a:avLst>
-              <a:gd name="adj" fmla="val 3137"/>
+              <a:gd name="adj" fmla="val 3902"/>
             </a:avLst>
           </a:prstGeom>
           <a:solidFill>
@@ -8530,7 +8874,7 @@
         </p:nvSpPr>
         <p:spPr>
           <a:xfrm>
-            <a:off x="4504944" y="4069080"/>
+            <a:off x="4504944" y="3611880"/>
             <a:ext cx="457200" cy="457200"/>
           </a:xfrm>
           <a:prstGeom prst="ellipse">
@@ -8550,7 +8894,7 @@
         </p:nvSpPr>
         <p:spPr>
           <a:xfrm>
-            <a:off x="4504944" y="4069080"/>
+            <a:off x="4504944" y="3611880"/>
             <a:ext cx="457200" cy="457200"/>
           </a:xfrm>
           <a:prstGeom prst="rect">
@@ -8589,8 +8933,8 @@
         </p:nvSpPr>
         <p:spPr>
           <a:xfrm>
-            <a:off x="5099304" y="3995928"/>
-            <a:ext cx="2630424" cy="2112264"/>
+            <a:off x="5099304" y="3538728"/>
+            <a:ext cx="2630424" cy="1655064"/>
           </a:xfrm>
           <a:prstGeom prst="rect">
             <a:avLst/>
@@ -8630,12 +8974,12 @@
         </p:nvSpPr>
         <p:spPr>
           <a:xfrm>
-            <a:off x="8095488" y="3886200"/>
-            <a:ext cx="3544824" cy="2331720"/>
+            <a:off x="8095488" y="3429000"/>
+            <a:ext cx="3544824" cy="1874520"/>
           </a:xfrm>
           <a:prstGeom prst="roundRect">
             <a:avLst>
-              <a:gd name="adj" fmla="val 3137"/>
+              <a:gd name="adj" fmla="val 3902"/>
             </a:avLst>
           </a:prstGeom>
           <a:solidFill>
@@ -8664,7 +9008,7 @@
         </p:nvSpPr>
         <p:spPr>
           <a:xfrm>
-            <a:off x="8278368" y="4069080"/>
+            <a:off x="8278368" y="3611880"/>
             <a:ext cx="457200" cy="457200"/>
           </a:xfrm>
           <a:prstGeom prst="ellipse">
@@ -8684,7 +9028,7 @@
         </p:nvSpPr>
         <p:spPr>
           <a:xfrm>
-            <a:off x="8278368" y="4069080"/>
+            <a:off x="8278368" y="3611880"/>
             <a:ext cx="457200" cy="457200"/>
           </a:xfrm>
           <a:prstGeom prst="rect">
@@ -8723,8 +9067,8 @@
         </p:nvSpPr>
         <p:spPr>
           <a:xfrm>
-            <a:off x="8872728" y="3995928"/>
-            <a:ext cx="2630424" cy="2112264"/>
+            <a:off x="8872728" y="3538728"/>
+            <a:ext cx="2630424" cy="1655064"/>
           </a:xfrm>
           <a:prstGeom prst="rect">
             <a:avLst/>
@@ -8753,6 +9097,92 @@
               <a:t>Vídeo de até 5 minutos apresentando a empresa (opcional no autoestudo)</a:t>
             </a:r>
             <a:endParaRPr lang="en-US" sz="1800" dirty="0"/>
+          </a:p>
+        </p:txBody>
+      </p:sp>
+      <p:sp>
+        <p:nvSpPr>
+          <p:cNvPr id="33" name="Shape 30"/>
+          <p:cNvSpPr/>
+          <p:nvPr/>
+        </p:nvSpPr>
+        <p:spPr>
+          <a:xfrm>
+            <a:off x="548640" y="5413248"/>
+            <a:ext cx="11091672" cy="868680"/>
+          </a:xfrm>
+          <a:prstGeom prst="roundRect">
+            <a:avLst>
+              <a:gd name="adj" fmla="val 8421"/>
+            </a:avLst>
+          </a:prstGeom>
+          <a:solidFill>
+            <a:srgbClr val="EEF3FA"/>
+          </a:solidFill>
+          <a:ln w="6350">
+            <a:solidFill>
+              <a:srgbClr val="D8E0EC"/>
+            </a:solidFill>
+            <a:prstDash val="solid"/>
+          </a:ln>
+        </p:spPr>
+      </p:sp>
+      <p:sp>
+        <p:nvSpPr>
+          <p:cNvPr id="34" name="Shape 31"/>
+          <p:cNvSpPr/>
+          <p:nvPr/>
+        </p:nvSpPr>
+        <p:spPr>
+          <a:xfrm>
+            <a:off x="548640" y="5413248"/>
+            <a:ext cx="91440" cy="868680"/>
+          </a:xfrm>
+          <a:prstGeom prst="rect">
+            <a:avLst/>
+          </a:prstGeom>
+          <a:solidFill>
+            <a:srgbClr val="F7A23B"/>
+          </a:solidFill>
+          <a:ln/>
+        </p:spPr>
+      </p:sp>
+      <p:sp>
+        <p:nvSpPr>
+          <p:cNvPr id="35" name="Text 32"/>
+          <p:cNvSpPr/>
+          <p:nvPr/>
+        </p:nvSpPr>
+        <p:spPr>
+          <a:xfrm>
+            <a:off x="777240" y="5458968"/>
+            <a:ext cx="10744200" cy="777240"/>
+          </a:xfrm>
+          <a:prstGeom prst="rect">
+            <a:avLst/>
+          </a:prstGeom>
+          <a:noFill/>
+          <a:ln/>
+        </p:spPr>
+        <p:txBody>
+          <a:bodyPr wrap="square" rtlCol="0" anchor="ctr"/>
+          <a:lstStyle/>
+          <a:p>
+            <a:pPr indent="0" marL="0">
+              <a:buNone/>
+            </a:pPr>
+            <a:r>
+              <a:rPr lang="en-US" sz="1500" dirty="0">
+                <a:solidFill>
+                  <a:srgbClr val="1F2937"/>
+                </a:solidFill>
+                <a:latin typeface="Arial" pitchFamily="34" charset="0"/>
+                <a:ea typeface="Arial" pitchFamily="34" charset="-122"/>
+                <a:cs typeface="Arial" pitchFamily="34" charset="-120"/>
+              </a:rPr>
+              <a:t>Em documento, entregue os itens da tela.</a:t>
+            </a:r>
+            <a:endParaRPr lang="en-US" sz="1500" dirty="0"/>
           </a:p>
         </p:txBody>
       </p:sp>
@@ -9072,11 +9502,11 @@
         <p:spPr>
           <a:xfrm>
             <a:off x="548640" y="1325880"/>
-            <a:ext cx="5431536" cy="4892040"/>
+            <a:ext cx="5431536" cy="3977640"/>
           </a:xfrm>
           <a:prstGeom prst="roundRect">
             <a:avLst>
-              <a:gd name="adj" fmla="val 1495"/>
+              <a:gd name="adj" fmla="val 1839"/>
             </a:avLst>
           </a:prstGeom>
           <a:solidFill>
@@ -9165,7 +9595,7 @@
         <p:spPr>
           <a:xfrm>
             <a:off x="1325880" y="1435608"/>
-            <a:ext cx="4517136" cy="4672584"/>
+            <a:ext cx="4517136" cy="3758184"/>
           </a:xfrm>
           <a:prstGeom prst="rect">
             <a:avLst/>
@@ -9206,11 +9636,11 @@
         <p:spPr>
           <a:xfrm>
             <a:off x="6208776" y="1325880"/>
-            <a:ext cx="5431536" cy="4892040"/>
+            <a:ext cx="5431536" cy="3977640"/>
           </a:xfrm>
           <a:prstGeom prst="roundRect">
             <a:avLst>
-              <a:gd name="adj" fmla="val 1495"/>
+              <a:gd name="adj" fmla="val 1839"/>
             </a:avLst>
           </a:prstGeom>
           <a:solidFill>
@@ -9299,7 +9729,7 @@
         <p:spPr>
           <a:xfrm>
             <a:off x="6986016" y="1435608"/>
-            <a:ext cx="4517136" cy="4672584"/>
+            <a:ext cx="4517136" cy="3758184"/>
           </a:xfrm>
           <a:prstGeom prst="rect">
             <a:avLst/>
@@ -9328,6 +9758,92 @@
               <a:t>Semana 2: relatórios, documentos, vídeo, revisão pela rubrica</a:t>
             </a:r>
             <a:endParaRPr lang="en-US" sz="1800" dirty="0"/>
+          </a:p>
+        </p:txBody>
+      </p:sp>
+      <p:sp>
+        <p:nvSpPr>
+          <p:cNvPr id="17" name="Shape 14"/>
+          <p:cNvSpPr/>
+          <p:nvPr/>
+        </p:nvSpPr>
+        <p:spPr>
+          <a:xfrm>
+            <a:off x="548640" y="5413248"/>
+            <a:ext cx="11091672" cy="868680"/>
+          </a:xfrm>
+          <a:prstGeom prst="roundRect">
+            <a:avLst>
+              <a:gd name="adj" fmla="val 8421"/>
+            </a:avLst>
+          </a:prstGeom>
+          <a:solidFill>
+            <a:srgbClr val="EEF3FA"/>
+          </a:solidFill>
+          <a:ln w="6350">
+            <a:solidFill>
+              <a:srgbClr val="D8E0EC"/>
+            </a:solidFill>
+            <a:prstDash val="solid"/>
+          </a:ln>
+        </p:spPr>
+      </p:sp>
+      <p:sp>
+        <p:nvSpPr>
+          <p:cNvPr id="18" name="Shape 15"/>
+          <p:cNvSpPr/>
+          <p:nvPr/>
+        </p:nvSpPr>
+        <p:spPr>
+          <a:xfrm>
+            <a:off x="548640" y="5413248"/>
+            <a:ext cx="91440" cy="868680"/>
+          </a:xfrm>
+          <a:prstGeom prst="rect">
+            <a:avLst/>
+          </a:prstGeom>
+          <a:solidFill>
+            <a:srgbClr val="F7A23B"/>
+          </a:solidFill>
+          <a:ln/>
+        </p:spPr>
+      </p:sp>
+      <p:sp>
+        <p:nvSpPr>
+          <p:cNvPr id="19" name="Text 16"/>
+          <p:cNvSpPr/>
+          <p:nvPr/>
+        </p:nvSpPr>
+        <p:spPr>
+          <a:xfrm>
+            <a:off x="777240" y="5458968"/>
+            <a:ext cx="10744200" cy="777240"/>
+          </a:xfrm>
+          <a:prstGeom prst="rect">
+            <a:avLst/>
+          </a:prstGeom>
+          <a:noFill/>
+          <a:ln/>
+        </p:spPr>
+        <p:txBody>
+          <a:bodyPr wrap="square" rtlCol="0" anchor="ctr"/>
+          <a:lstStyle/>
+          <a:p>
+            <a:pPr indent="0" marL="0">
+              <a:buNone/>
+            </a:pPr>
+            <a:r>
+              <a:rPr lang="en-US" sz="1500" dirty="0">
+                <a:solidFill>
+                  <a:srgbClr val="1F2937"/>
+                </a:solidFill>
+                <a:latin typeface="Arial" pitchFamily="34" charset="0"/>
+                <a:ea typeface="Arial" pitchFamily="34" charset="-122"/>
+                <a:cs typeface="Arial" pitchFamily="34" charset="-120"/>
+              </a:rPr>
+              <a:t>Organize em duas semanas: primeiro o laboratório, depois os documentos e a revisão pela rubrica.</a:t>
+            </a:r>
+            <a:endParaRPr lang="en-US" sz="1500" dirty="0"/>
           </a:p>
         </p:txBody>
       </p:sp>
@@ -10026,7 +10542,7 @@
         </p:nvGraphicFramePr>
         <p:xfrm>
           <a:off x="548640" y="1325880"/>
-          <a:ext cx="5669280" cy="4937760"/>
+          <a:ext cx="5669280" cy="3977640"/>
         </p:xfrm>
         <a:graphic xmlns:a="http://schemas.openxmlformats.org/drawingml/2006/main">
           <a:graphicData uri="http://schemas.openxmlformats.org/drawingml/2006/chart">
@@ -10049,7 +10565,7 @@
           </p:nvPr>
         </p:nvGraphicFramePr>
         <p:xfrm>
-          <a:off x="6446520" y="1600200"/>
+          <a:off x="6446520" y="1508760"/>
           <a:ext cx="5193792" cy="914400"/>
         </p:xfrm>
         <a:graphic>
@@ -10894,6 +11410,92 @@
       </p:graphicFrame>
       <p:sp>
         <p:nvSpPr>
+          <p:cNvPr id="11" name="Shape 6"/>
+          <p:cNvSpPr/>
+          <p:nvPr/>
+        </p:nvSpPr>
+        <p:spPr>
+          <a:xfrm>
+            <a:off x="548640" y="5413248"/>
+            <a:ext cx="11091672" cy="868680"/>
+          </a:xfrm>
+          <a:prstGeom prst="roundRect">
+            <a:avLst>
+              <a:gd name="adj" fmla="val 8421"/>
+            </a:avLst>
+          </a:prstGeom>
+          <a:solidFill>
+            <a:srgbClr val="EEF3FA"/>
+          </a:solidFill>
+          <a:ln w="6350">
+            <a:solidFill>
+              <a:srgbClr val="D8E0EC"/>
+            </a:solidFill>
+            <a:prstDash val="solid"/>
+          </a:ln>
+        </p:spPr>
+      </p:sp>
+      <p:sp>
+        <p:nvSpPr>
+          <p:cNvPr id="12" name="Shape 7"/>
+          <p:cNvSpPr/>
+          <p:nvPr/>
+        </p:nvSpPr>
+        <p:spPr>
+          <a:xfrm>
+            <a:off x="548640" y="5413248"/>
+            <a:ext cx="91440" cy="868680"/>
+          </a:xfrm>
+          <a:prstGeom prst="rect">
+            <a:avLst/>
+          </a:prstGeom>
+          <a:solidFill>
+            <a:srgbClr val="F7A23B"/>
+          </a:solidFill>
+          <a:ln/>
+        </p:spPr>
+      </p:sp>
+      <p:sp>
+        <p:nvSpPr>
+          <p:cNvPr id="13" name="Text 8"/>
+          <p:cNvSpPr/>
+          <p:nvPr/>
+        </p:nvSpPr>
+        <p:spPr>
+          <a:xfrm>
+            <a:off x="777240" y="5458968"/>
+            <a:ext cx="10744200" cy="777240"/>
+          </a:xfrm>
+          <a:prstGeom prst="rect">
+            <a:avLst/>
+          </a:prstGeom>
+          <a:noFill/>
+          <a:ln/>
+        </p:spPr>
+        <p:txBody>
+          <a:bodyPr wrap="square" rtlCol="0" anchor="ctr"/>
+          <a:lstStyle/>
+          <a:p>
+            <a:pPr indent="0" marL="0">
+              <a:buNone/>
+            </a:pPr>
+            <a:r>
+              <a:rPr lang="en-US" sz="1500" dirty="0">
+                <a:solidFill>
+                  <a:srgbClr val="1F2937"/>
+                </a:solidFill>
+                <a:latin typeface="Arial" pitchFamily="34" charset="0"/>
+                <a:ea typeface="Arial" pitchFamily="34" charset="-122"/>
+                <a:cs typeface="Arial" pitchFamily="34" charset="-120"/>
+              </a:rPr>
+              <a:t>O maior peso é a operação no laboratório. Nos documentos, vale a coerência dos números, a análise e a linguagem correta.</a:t>
+            </a:r>
+            <a:endParaRPr lang="en-US" sz="1500" dirty="0"/>
+          </a:p>
+        </p:txBody>
+      </p:sp>
+      <p:sp>
+        <p:nvSpPr>
           <p:cNvPr id="25" name="Slide Number Placeholder 0"/>
           <p:cNvSpPr>
             <a:spLocks noGrp="1"/>
@@ -11208,7 +11810,7 @@
         <p:spPr>
           <a:xfrm>
             <a:off x="548640" y="1325880"/>
-            <a:ext cx="3544824" cy="4892040"/>
+            <a:ext cx="3544824" cy="3977640"/>
           </a:xfrm>
           <a:prstGeom prst="roundRect">
             <a:avLst>
@@ -11301,7 +11903,7 @@
         <p:spPr>
           <a:xfrm>
             <a:off x="1325880" y="1435608"/>
-            <a:ext cx="2630424" cy="4672584"/>
+            <a:ext cx="2630424" cy="3758184"/>
           </a:xfrm>
           <a:prstGeom prst="rect">
             <a:avLst/>
@@ -11342,7 +11944,7 @@
         <p:spPr>
           <a:xfrm>
             <a:off x="4322064" y="1325880"/>
-            <a:ext cx="3544824" cy="4892040"/>
+            <a:ext cx="3544824" cy="3977640"/>
           </a:xfrm>
           <a:prstGeom prst="roundRect">
             <a:avLst>
@@ -11435,7 +12037,7 @@
         <p:spPr>
           <a:xfrm>
             <a:off x="5099304" y="1435608"/>
-            <a:ext cx="2630424" cy="4672584"/>
+            <a:ext cx="2630424" cy="3758184"/>
           </a:xfrm>
           <a:prstGeom prst="rect">
             <a:avLst/>
@@ -11476,7 +12078,7 @@
         <p:spPr>
           <a:xfrm>
             <a:off x="8095488" y="1325880"/>
-            <a:ext cx="3544824" cy="4892040"/>
+            <a:ext cx="3544824" cy="3977640"/>
           </a:xfrm>
           <a:prstGeom prst="roundRect">
             <a:avLst>
@@ -11569,7 +12171,7 @@
         <p:spPr>
           <a:xfrm>
             <a:off x="8872728" y="1435608"/>
-            <a:ext cx="2630424" cy="4672584"/>
+            <a:ext cx="2630424" cy="3758184"/>
           </a:xfrm>
           <a:prstGeom prst="rect">
             <a:avLst/>
@@ -11598,6 +12200,92 @@
               <a:t>abaixo de 70%: devolutiva e uma nova entrega</a:t>
             </a:r>
             <a:endParaRPr lang="en-US" sz="1800" dirty="0"/>
+          </a:p>
+        </p:txBody>
+      </p:sp>
+      <p:sp>
+        <p:nvSpPr>
+          <p:cNvPr id="21" name="Shape 18"/>
+          <p:cNvSpPr/>
+          <p:nvPr/>
+        </p:nvSpPr>
+        <p:spPr>
+          <a:xfrm>
+            <a:off x="548640" y="5413248"/>
+            <a:ext cx="11091672" cy="868680"/>
+          </a:xfrm>
+          <a:prstGeom prst="roundRect">
+            <a:avLst>
+              <a:gd name="adj" fmla="val 8421"/>
+            </a:avLst>
+          </a:prstGeom>
+          <a:solidFill>
+            <a:srgbClr val="EEF3FA"/>
+          </a:solidFill>
+          <a:ln w="6350">
+            <a:solidFill>
+              <a:srgbClr val="D8E0EC"/>
+            </a:solidFill>
+            <a:prstDash val="solid"/>
+          </a:ln>
+        </p:spPr>
+      </p:sp>
+      <p:sp>
+        <p:nvSpPr>
+          <p:cNvPr id="22" name="Shape 19"/>
+          <p:cNvSpPr/>
+          <p:nvPr/>
+        </p:nvSpPr>
+        <p:spPr>
+          <a:xfrm>
+            <a:off x="548640" y="5413248"/>
+            <a:ext cx="91440" cy="868680"/>
+          </a:xfrm>
+          <a:prstGeom prst="rect">
+            <a:avLst/>
+          </a:prstGeom>
+          <a:solidFill>
+            <a:srgbClr val="F7A23B"/>
+          </a:solidFill>
+          <a:ln/>
+        </p:spPr>
+      </p:sp>
+      <p:sp>
+        <p:nvSpPr>
+          <p:cNvPr id="23" name="Text 20"/>
+          <p:cNvSpPr/>
+          <p:nvPr/>
+        </p:nvSpPr>
+        <p:spPr>
+          <a:xfrm>
+            <a:off x="777240" y="5458968"/>
+            <a:ext cx="10744200" cy="777240"/>
+          </a:xfrm>
+          <a:prstGeom prst="rect">
+            <a:avLst/>
+          </a:prstGeom>
+          <a:noFill/>
+          <a:ln/>
+        </p:spPr>
+        <p:txBody>
+          <a:bodyPr wrap="square" rtlCol="0" anchor="ctr"/>
+          <a:lstStyle/>
+          <a:p>
+            <a:pPr indent="0" marL="0">
+              <a:buNone/>
+            </a:pPr>
+            <a:r>
+              <a:rPr lang="en-US" sz="1500" dirty="0">
+                <a:solidFill>
+                  <a:srgbClr val="1F2937"/>
+                </a:solidFill>
+                <a:latin typeface="Arial" pitchFamily="34" charset="0"/>
+                <a:ea typeface="Arial" pitchFamily="34" charset="-122"/>
+                <a:cs typeface="Arial" pitchFamily="34" charset="-120"/>
+              </a:rPr>
+              <a:t>Setenta por cento aprova; noventa, com distinção.</a:t>
+            </a:r>
+            <a:endParaRPr lang="en-US" sz="1500" dirty="0"/>
           </a:p>
         </p:txBody>
       </p:sp>

--- a/docs/curso/slides/m12-projeto-final.pptx
+++ b/docs/curso/slides/m12-projeto-final.pptx
@@ -122,7 +122,7 @@
 </p:presentation>
 </file>
 
-<file path=ppt/charts/chart4.xml><?xml version="1.0" encoding="utf-8"?>
+<file path=ppt/charts/chart7.xml><?xml version="1.0" encoding="utf-8"?>
 <c:chartSpace xmlns:c="http://schemas.openxmlformats.org/drawingml/2006/chart" xmlns:a="http://schemas.openxmlformats.org/drawingml/2006/main" xmlns:r="http://schemas.openxmlformats.org/officeDocument/2006/relationships">
   <c:date1904 val="0"/>
   <c:roundedCorners val="1"/>

--- a/docs/curso/slides/m12-projeto-final.pptx
+++ b/docs/curso/slides/m12-projeto-final.pptx
@@ -2833,7 +2833,7 @@
                 <a:ea typeface="Arial" pitchFamily="34" charset="-122"/>
                 <a:cs typeface="Arial" pitchFamily="34" charset="-120"/>
               </a:rPr>
-              <a:t>3. exemplo resolvido — três meses de operação</a:t>
+              <a:t>3. Exemplo resolvido — três meses de operação</a:t>
             </a:r>
             <a:endParaRPr lang="en-US" sz="1400" dirty="0"/>
           </a:p>
@@ -4960,7 +4960,7 @@
             <a:r>
               <a:rPr lang="en-US" sz="11000" b="1" dirty="0">
                 <a:solidFill>
-                  <a:srgbClr val="11396F"/>
+                  <a:srgbClr val="F7A23B"/>
                 </a:solidFill>
                 <a:latin typeface="Arial" pitchFamily="34" charset="0"/>
                 <a:ea typeface="Arial" pitchFamily="34" charset="-122"/>
@@ -5083,7 +5083,7 @@
                 <a:ea typeface="Arial" pitchFamily="34" charset="-122"/>
                 <a:cs typeface="Arial" pitchFamily="34" charset="-120"/>
               </a:rPr>
-              <a:t>Aula</a:t>
+              <a:t>Aula teórica</a:t>
             </a:r>
             <a:endParaRPr lang="en-US" sz="1400" dirty="0"/>
           </a:p>
@@ -7134,7 +7134,7 @@
             <a:r>
               <a:rPr lang="en-US" sz="11000" b="1" dirty="0">
                 <a:solidFill>
-                  <a:srgbClr val="11396F"/>
+                  <a:srgbClr val="F7A23B"/>
                 </a:solidFill>
                 <a:latin typeface="Arial" pitchFamily="34" charset="0"/>
                 <a:ea typeface="Arial" pitchFamily="34" charset="-122"/>
@@ -7257,7 +7257,7 @@
                 <a:ea typeface="Arial" pitchFamily="34" charset="-122"/>
                 <a:cs typeface="Arial" pitchFamily="34" charset="-120"/>
               </a:rPr>
-              <a:t>Aula</a:t>
+              <a:t>Aula teórica</a:t>
             </a:r>
             <a:endParaRPr lang="en-US" sz="1400" dirty="0"/>
           </a:p>
@@ -9974,7 +9974,7 @@
             <a:r>
               <a:rPr lang="en-US" sz="11000" b="1" dirty="0">
                 <a:solidFill>
-                  <a:srgbClr val="11396F"/>
+                  <a:srgbClr val="F7A23B"/>
                 </a:solidFill>
                 <a:latin typeface="Arial" pitchFamily="34" charset="0"/>
                 <a:ea typeface="Arial" pitchFamily="34" charset="-122"/>
@@ -10097,7 +10097,7 @@
                 <a:ea typeface="Arial" pitchFamily="34" charset="-122"/>
                 <a:cs typeface="Arial" pitchFamily="34" charset="-120"/>
               </a:rPr>
-              <a:t>Aula</a:t>
+              <a:t>Aula teórica</a:t>
             </a:r>
             <a:endParaRPr lang="en-US" sz="1400" dirty="0"/>
           </a:p>
@@ -12416,7 +12416,7 @@
             <a:r>
               <a:rPr lang="en-US" sz="11000" b="1" dirty="0">
                 <a:solidFill>
-                  <a:srgbClr val="11396F"/>
+                  <a:srgbClr val="F7A23B"/>
                 </a:solidFill>
                 <a:latin typeface="Arial" pitchFamily="34" charset="0"/>
                 <a:ea typeface="Arial" pitchFamily="34" charset="-122"/>
@@ -12604,7 +12604,7 @@
                 <a:ea typeface="Arial" pitchFamily="34" charset="-122"/>
                 <a:cs typeface="Arial" pitchFamily="34" charset="-120"/>
               </a:rPr>
-              <a:t>exemplo resolvido — três meses de operação</a:t>
+              <a:t>Exemplo resolvido — três meses de operação</a:t>
             </a:r>
             <a:endParaRPr lang="en-US" sz="3200" dirty="0"/>
           </a:p>
